--- a/presentations/PR_L02_Arithmetic_Lesson.pptx
+++ b/presentations/PR_L02_Arithmetic_Lesson.pptx
@@ -2167,7 +2167,7 @@
                 <a:ea typeface="IBM Plex Sans" pitchFamily="34" charset="-122"/>
                 <a:cs typeface="IBM Plex Sans" pitchFamily="34" charset="-120"/>
               </a:rPr>
-              <a:t>Computers were built to calculate, and Python has an operator for every kind of sum in the specification. Work through the number workshop and learn which one to reach for.</a:t>
+              <a:t>Computers were built to calculate, and Python has an operator for every kind of sum in the specification. Work through the six stations and learn which one to reach for, and what each one hands back.</a:t>
             </a:r>
             <a:endParaRPr lang="en-US" sz="1800" dirty="0"/>
           </a:p>
@@ -2617,7 +2617,7 @@
                 <a:ea typeface="IBM Plex Sans" pitchFamily="34" charset="-122"/>
                 <a:cs typeface="IBM Plex Sans" pitchFamily="34" charset="-120"/>
               </a:rPr>
-              <a:t>Common mistake: rounding part way through, which makes every figure after it slightly wrong.</a:t>
+              <a:t>Common mistake: leaving brackets out, so Python works the sum out in a different order from the one you meant.</a:t>
             </a:r>
             <a:endParaRPr lang="en-US" sz="1700" dirty="0"/>
           </a:p>
@@ -2805,7 +2805,7 @@
                 <a:ea typeface="IBM Plex Sans" pitchFamily="34" charset="-122"/>
                 <a:cs typeface="IBM Plex Sans" pitchFamily="34" charset="-120"/>
               </a:rPr>
-              <a:t>BIDMAS is the same rule in a maths lesson as it is in a Python program.</a:t>
+              <a:t>BIDMAS in a maths lesson is the same rule Python uses for...</a:t>
             </a:r>
             <a:endParaRPr lang="en-US" sz="1600" dirty="0"/>
           </a:p>
@@ -3104,7 +3104,7 @@
                 <a:ea typeface="IBM Plex Sans" pitchFamily="34" charset="-122"/>
                 <a:cs typeface="IBM Plex Sans" pitchFamily="34" charset="-120"/>
               </a:rPr>
-              <a:t>Eight jobs have come into the workshop. Tap the star and choose the operator or function each one needs.</a:t>
+              <a:t>Eight jobs are waiting on the floor below you. Tap the star and choose the operator or function each one needs.</a:t>
             </a:r>
             <a:endParaRPr lang="en-US" sz="2200" dirty="0"/>
           </a:p>
@@ -4060,7 +4060,7 @@
                 <a:ea typeface="IBM Plex Sans" pitchFamily="34" charset="-122"/>
                 <a:cs typeface="IBM Plex Sans" pitchFamily="34" charset="-120"/>
               </a:rPr>
-              <a:t>A program works out how many full boxes of 6 eggs a crate will fill, and the line reads boxes = eggs / 6. State what is wrong with the result this gives, and write the line corrected.</a:t>
+              <a:t>A program works out how many whole 6s go into a number, and the line reads lots = n / 6. State what is wrong with the result this gives, and write the line corrected.</a:t>
             </a:r>
             <a:endParaRPr lang="en-US" sz="1700" dirty="0"/>
           </a:p>
@@ -4190,7 +4190,7 @@
                 <a:ea typeface="IBM Plex Sans" pitchFamily="34" charset="-122"/>
                 <a:cs typeface="IBM Plex Sans" pitchFamily="34" charset="-120"/>
               </a:rPr>
-              <a:t>Write a program that reads a number of minutes and prints it as a number of whole hours and the minutes left over.</a:t>
+              <a:t>Write a program that reads a whole number of pence and prints how many whole pounds are in it, then how many pence are left over on the next line.</a:t>
             </a:r>
             <a:endParaRPr lang="en-US" sz="1700" dirty="0"/>
           </a:p>
@@ -4320,7 +4320,7 @@
                 <a:ea typeface="IBM Plex Sans" pitchFamily="34" charset="-122"/>
                 <a:cs typeface="IBM Plex Sans" pitchFamily="34" charset="-120"/>
               </a:rPr>
-              <a:t>Write a program that reads two amounts of money in pounds and prints their mean, rounded to two decimal places.</a:t>
+              <a:t>Write a program that reads three whole numbers and prints their average, rounded to one decimal place.</a:t>
             </a:r>
             <a:endParaRPr lang="en-US" sz="1700" dirty="0"/>
           </a:p>
@@ -5183,7 +5183,7 @@
                 <a:ea typeface="IBM Plex Sans" pitchFamily="34" charset="-122"/>
                 <a:cs typeface="IBM Plex Sans" pitchFamily="34" charset="-120"/>
               </a:rPr>
-              <a:t>Rounding a result and drawing a random number</a:t>
+              <a:t>Rounding a result and seeding a random number</a:t>
             </a:r>
             <a:endParaRPr lang="en-US" sz="1800" dirty="0"/>
           </a:p>
@@ -5726,7 +5726,7 @@
                 <a:ea typeface="IBM Plex Sans" pitchFamily="34" charset="-122"/>
                 <a:cs typeface="IBM Plex Sans" pitchFamily="34" charset="-120"/>
               </a:rPr>
-              <a:t>Know which arithmetic operator to use for each kind of calculation</a:t>
+              <a:t>Know which arithmetic operator each kind of calculation needs</a:t>
             </a:r>
             <a:endParaRPr lang="en-US" sz="1900" dirty="0"/>
           </a:p>
@@ -5922,7 +5922,7 @@
                 <a:ea typeface="IBM Plex Sans" pitchFamily="34" charset="-122"/>
                 <a:cs typeface="IBM Plex Sans" pitchFamily="34" charset="-120"/>
               </a:rPr>
-              <a:t>Know how to round a result and how to draw a random number</a:t>
+              <a:t>Know how to round a result, and how to draw a random number from a seed</a:t>
             </a:r>
             <a:endParaRPr lang="en-US" sz="1900" dirty="0"/>
           </a:p>
@@ -6590,7 +6590,7 @@
                 <a:ea typeface="IBM Plex Sans" pitchFamily="34" charset="-122"/>
                 <a:cs typeface="IBM Plex Sans" pitchFamily="34" charset="-120"/>
               </a:rPr>
-              <a:t>Work these out by hand, with no computer: 17 / 5, 17 // 5, 17 % 5 and 2 ** 5. Beside each answer write whether Python gives a whole number or a decimal.</a:t>
+              <a:t>Work these out by hand, with no computer: 17 / 5, 17 // 5, 17 % 5 and 2 ** 5. Beside each answer write whether Python shows a whole number or a decimal.</a:t>
             </a:r>
             <a:endParaRPr lang="en-US" sz="2600" dirty="0"/>
           </a:p>
@@ -7749,7 +7749,7 @@
                 <a:ea typeface="IBM Plex Sans" pitchFamily="34" charset="-122"/>
                 <a:cs typeface="IBM Plex Sans" pitchFamily="34" charset="-120"/>
               </a:rPr>
-              <a:t>/ always gives a float, so 10 / 2 prints 5.0 rather than 5.</a:t>
+              <a:t>/ always gives a float, so 10 / 2 shows as 5.0 rather than 5.</a:t>
             </a:r>
             <a:endParaRPr lang="en-US" sz="1700" dirty="0"/>
           </a:p>
@@ -7881,7 +7881,7 @@
                 <a:ea typeface="IBM Plex Sans" pitchFamily="34" charset="-122"/>
                 <a:cs typeface="IBM Plex Sans" pitchFamily="34" charset="-120"/>
               </a:rPr>
-              <a:t>Which operator would you use to halve the price of a pencil?</a:t>
+              <a:t>Why does dividing one whole number by another leave a decimal point on the answer?</a:t>
             </a:r>
             <a:endParaRPr lang="en-US" sz="1600" dirty="0"/>
           </a:p>
@@ -7961,7 +7961,7 @@
                 <a:ea typeface="IBM Plex Sans" pitchFamily="34" charset="-122"/>
                 <a:cs typeface="IBM Plex Sans" pitchFamily="34" charset="-120"/>
               </a:rPr>
-              <a:t>The * was chosen for multiply because early keyboards had no times sign on them.</a:t>
+              <a:t>The * was chosen for multiply because early keyboards had no...</a:t>
             </a:r>
             <a:endParaRPr lang="en-US" sz="1600" dirty="0"/>
           </a:p>
@@ -8457,7 +8457,7 @@
                 <a:ea typeface="IBM Plex Sans" pitchFamily="34" charset="-122"/>
                 <a:cs typeface="IBM Plex Sans" pitchFamily="34" charset="-120"/>
               </a:rPr>
-              <a:t>How many full crates of 12 do 50 returned books fill, and how many are left over?</a:t>
+              <a:t>Which two operators turn 250 pence into a number of whole pounds and the pence left over?</a:t>
             </a:r>
             <a:endParaRPr lang="en-US" sz="1600" dirty="0"/>
           </a:p>
@@ -8537,7 +8537,7 @@
                 <a:ea typeface="IBM Plex Sans" pitchFamily="34" charset="-122"/>
                 <a:cs typeface="IBM Plex Sans" pitchFamily="34" charset="-120"/>
               </a:rPr>
-              <a:t>% is the quickest test for an even number: n % 2 is 0 whenever n is even.</a:t>
+              <a:t>// and % are a pair: one gives the whole part and the other gives...</a:t>
             </a:r>
             <a:endParaRPr lang="en-US" sz="1600" dirty="0"/>
           </a:p>
@@ -9113,7 +9113,7 @@
                 <a:ea typeface="IBM Plex Sans" pitchFamily="34" charset="-122"/>
                 <a:cs typeface="IBM Plex Sans" pitchFamily="34" charset="-120"/>
               </a:rPr>
-              <a:t>** is the exponent operator, and exponent is simply another word for power.</a:t>
+              <a:t>Raising a number to the power 0.5 gives its...</a:t>
             </a:r>
             <a:endParaRPr lang="en-US" sz="1600" dirty="0"/>
           </a:p>
@@ -9609,7 +9609,7 @@
                 <a:ea typeface="IBM Plex Sans" pitchFamily="34" charset="-122"/>
                 <a:cs typeface="IBM Plex Sans" pitchFamily="34" charset="-120"/>
               </a:rPr>
-              <a:t>Why does a till round to 2 decimal places rather than to a whole number?</a:t>
+              <a:t>Why does an average almost always need rounding before it is printed?</a:t>
             </a:r>
             <a:endParaRPr lang="en-US" sz="1600" dirty="0"/>
           </a:p>
@@ -9689,7 +9689,7 @@
                 <a:ea typeface="IBM Plex Sans" pitchFamily="34" charset="-122"/>
                 <a:cs typeface="IBM Plex Sans" pitchFamily="34" charset="-120"/>
               </a:rPr>
-              <a:t>Python rounds a value ending in exactly .5 towards the even number, so round(2.5) is 2.</a:t>
+              <a:t>Python rounds a value ending in exactly .5 towards the...</a:t>
             </a:r>
             <a:endParaRPr lang="en-US" sz="1600" dirty="0"/>
           </a:p>
@@ -10265,7 +10265,7 @@
                 <a:ea typeface="IBM Plex Sans" pitchFamily="34" charset="-122"/>
                 <a:cs typeface="IBM Plex Sans" pitchFamily="34" charset="-120"/>
               </a:rPr>
-              <a:t>A computer works its random numbers out with a formula, so they are really pseudo-random.</a:t>
+              <a:t>A computer works its random numbers out with a formula, so they are really...</a:t>
             </a:r>
             <a:endParaRPr lang="en-US" sz="1600" dirty="0"/>
           </a:p>

--- a/presentations/PR_L02_Arithmetic_Lesson.pptx
+++ b/presentations/PR_L02_Arithmetic_Lesson.pptx
@@ -4060,7 +4060,177 @@
                 <a:ea typeface="IBM Plex Sans" pitchFamily="34" charset="-122"/>
                 <a:cs typeface="IBM Plex Sans" pitchFamily="34" charset="-120"/>
               </a:rPr>
-              <a:t>A program works out how many whole 6s go into a number, and the line reads lots = n / 6. State what is wrong with the result this gives, and write the line corrected.</a:t>
+              <a:t>A program works out how many whole 6s go into a number, and the line reads </a:t>
+            </a:r>
+            <a:pPr indent="0" marL="0">
+              <a:lnSpc>
+                <a:spcPct val="118000"/>
+              </a:lnSpc>
+              <a:buNone/>
+            </a:pPr>
+            <a:r>
+              <a:rPr lang="en-US" sz="1700" dirty="0">
+                <a:solidFill>
+                  <a:srgbClr val="18181B"/>
+                </a:solidFill>
+                <a:latin typeface="IBM Plex Mono" pitchFamily="34" charset="0"/>
+                <a:ea typeface="IBM Plex Mono" pitchFamily="34" charset="-122"/>
+                <a:cs typeface="IBM Plex Mono" pitchFamily="34" charset="-120"/>
+              </a:rPr>
+              <a:t>lots</a:t>
+            </a:r>
+            <a:pPr indent="0" marL="0">
+              <a:lnSpc>
+                <a:spcPct val="118000"/>
+              </a:lnSpc>
+              <a:buNone/>
+            </a:pPr>
+            <a:r>
+              <a:rPr lang="en-US" sz="1700" dirty="0">
+                <a:solidFill>
+                  <a:srgbClr val="18181B"/>
+                </a:solidFill>
+                <a:latin typeface="IBM Plex Mono" pitchFamily="34" charset="0"/>
+                <a:ea typeface="IBM Plex Mono" pitchFamily="34" charset="-122"/>
+                <a:cs typeface="IBM Plex Mono" pitchFamily="34" charset="-120"/>
+              </a:rPr>
+              <a:t> </a:t>
+            </a:r>
+            <a:pPr indent="0" marL="0">
+              <a:lnSpc>
+                <a:spcPct val="118000"/>
+              </a:lnSpc>
+              <a:buNone/>
+            </a:pPr>
+            <a:r>
+              <a:rPr lang="en-US" sz="1700" dirty="0">
+                <a:solidFill>
+                  <a:srgbClr val="3F3F46"/>
+                </a:solidFill>
+                <a:latin typeface="IBM Plex Mono" pitchFamily="34" charset="0"/>
+                <a:ea typeface="IBM Plex Mono" pitchFamily="34" charset="-122"/>
+                <a:cs typeface="IBM Plex Mono" pitchFamily="34" charset="-120"/>
+              </a:rPr>
+              <a:t>=</a:t>
+            </a:r>
+            <a:pPr indent="0" marL="0">
+              <a:lnSpc>
+                <a:spcPct val="118000"/>
+              </a:lnSpc>
+              <a:buNone/>
+            </a:pPr>
+            <a:r>
+              <a:rPr lang="en-US" sz="1700" dirty="0">
+                <a:solidFill>
+                  <a:srgbClr val="18181B"/>
+                </a:solidFill>
+                <a:latin typeface="IBM Plex Mono" pitchFamily="34" charset="0"/>
+                <a:ea typeface="IBM Plex Mono" pitchFamily="34" charset="-122"/>
+                <a:cs typeface="IBM Plex Mono" pitchFamily="34" charset="-120"/>
+              </a:rPr>
+              <a:t> </a:t>
+            </a:r>
+            <a:pPr indent="0" marL="0">
+              <a:lnSpc>
+                <a:spcPct val="118000"/>
+              </a:lnSpc>
+              <a:buNone/>
+            </a:pPr>
+            <a:r>
+              <a:rPr lang="en-US" sz="1700" dirty="0">
+                <a:solidFill>
+                  <a:srgbClr val="18181B"/>
+                </a:solidFill>
+                <a:latin typeface="IBM Plex Mono" pitchFamily="34" charset="0"/>
+                <a:ea typeface="IBM Plex Mono" pitchFamily="34" charset="-122"/>
+                <a:cs typeface="IBM Plex Mono" pitchFamily="34" charset="-120"/>
+              </a:rPr>
+              <a:t>n</a:t>
+            </a:r>
+            <a:pPr indent="0" marL="0">
+              <a:lnSpc>
+                <a:spcPct val="118000"/>
+              </a:lnSpc>
+              <a:buNone/>
+            </a:pPr>
+            <a:r>
+              <a:rPr lang="en-US" sz="1700" dirty="0">
+                <a:solidFill>
+                  <a:srgbClr val="18181B"/>
+                </a:solidFill>
+                <a:latin typeface="IBM Plex Mono" pitchFamily="34" charset="0"/>
+                <a:ea typeface="IBM Plex Mono" pitchFamily="34" charset="-122"/>
+                <a:cs typeface="IBM Plex Mono" pitchFamily="34" charset="-120"/>
+              </a:rPr>
+              <a:t> </a:t>
+            </a:r>
+            <a:pPr indent="0" marL="0">
+              <a:lnSpc>
+                <a:spcPct val="118000"/>
+              </a:lnSpc>
+              <a:buNone/>
+            </a:pPr>
+            <a:r>
+              <a:rPr lang="en-US" sz="1700" dirty="0">
+                <a:solidFill>
+                  <a:srgbClr val="3F3F46"/>
+                </a:solidFill>
+                <a:latin typeface="IBM Plex Mono" pitchFamily="34" charset="0"/>
+                <a:ea typeface="IBM Plex Mono" pitchFamily="34" charset="-122"/>
+                <a:cs typeface="IBM Plex Mono" pitchFamily="34" charset="-120"/>
+              </a:rPr>
+              <a:t>/</a:t>
+            </a:r>
+            <a:pPr indent="0" marL="0">
+              <a:lnSpc>
+                <a:spcPct val="118000"/>
+              </a:lnSpc>
+              <a:buNone/>
+            </a:pPr>
+            <a:r>
+              <a:rPr lang="en-US" sz="1700" dirty="0">
+                <a:solidFill>
+                  <a:srgbClr val="18181B"/>
+                </a:solidFill>
+                <a:latin typeface="IBM Plex Mono" pitchFamily="34" charset="0"/>
+                <a:ea typeface="IBM Plex Mono" pitchFamily="34" charset="-122"/>
+                <a:cs typeface="IBM Plex Mono" pitchFamily="34" charset="-120"/>
+              </a:rPr>
+              <a:t> </a:t>
+            </a:r>
+            <a:pPr indent="0" marL="0">
+              <a:lnSpc>
+                <a:spcPct val="118000"/>
+              </a:lnSpc>
+              <a:buNone/>
+            </a:pPr>
+            <a:r>
+              <a:rPr lang="en-US" sz="1700" dirty="0">
+                <a:solidFill>
+                  <a:srgbClr val="9A3412"/>
+                </a:solidFill>
+                <a:latin typeface="IBM Plex Mono" pitchFamily="34" charset="0"/>
+                <a:ea typeface="IBM Plex Mono" pitchFamily="34" charset="-122"/>
+                <a:cs typeface="IBM Plex Mono" pitchFamily="34" charset="-120"/>
+              </a:rPr>
+              <a:t>6</a:t>
+            </a:r>
+            <a:pPr indent="0" marL="0">
+              <a:lnSpc>
+                <a:spcPct val="118000"/>
+              </a:lnSpc>
+              <a:buNone/>
+            </a:pPr>
+            <a:r>
+              <a:rPr lang="en-US" sz="1700" dirty="0">
+                <a:solidFill>
+                  <a:srgbClr val="101828"/>
+                </a:solidFill>
+                <a:latin typeface="IBM Plex Sans" pitchFamily="34" charset="0"/>
+                <a:ea typeface="IBM Plex Sans" pitchFamily="34" charset="-122"/>
+                <a:cs typeface="IBM Plex Sans" pitchFamily="34" charset="-120"/>
+              </a:rPr>
+              <a:t>. State what is wrong with the result this gives, and write the line corrected.</a:t>
             </a:r>
             <a:endParaRPr lang="en-US" sz="1700" dirty="0"/>
           </a:p>

--- a/presentations/PR_L02_Arithmetic_Lesson.pptx
+++ b/presentations/PR_L02_Arithmetic_Lesson.pptx
@@ -19,9 +19,10 @@
     <p:sldId id="267" r:id="rId13"/>
     <p:sldId id="268" r:id="rId14"/>
     <p:sldId id="269" r:id="rId15"/>
+    <p:sldId id="270" r:id="rId16"/>
   </p:sldIdLst>
   <p:notesMasterIdLst>
-    <p:notesMasterId r:id="rId16"/>
+    <p:notesMasterId r:id="rId17"/>
   </p:notesMasterIdLst>
   <p:sldSz cx="12192000" cy="6858000"/>
   <p:notesSz cx="6858000" cy="12192000"/>
@@ -692,7 +693,13 @@
           <a:p>
             <a:r>
               <a:rPr lang="en-US" dirty="0"/>
-              <a:t>Make them commit to an answer on paper before they tap the star. Guessing first costs them the learning.</a:t>
+              <a:t>The answer is B: 5.0.
+Do not say it yet. Every pupil commits first - fingers, whiteboards or a show of hands on each letter in turn - and you count the split before anyone can change their mind.
+IF MOST OF THE CLASS IS RIGHT: say why it is right in one sentence and go straight on to the independent work.
+IF A SIGNIFICANT GROUP IS ON ONE WRONG LETTER: that option is the misconception to teach against before anyone goes on. Go back to station 3, Powers and roots, and work through its example again, aloud, with the class watching, then re-ask this question.
+The course's own response to a wrong answer here: 5 times 5 is 25, so the root is 5, and a fractional power always gives a decimal number.
+A limitation, stated rather than papered over: one response covers every wrong option; it does not say what to revisit for each one. The course does not record what each separate wrong option means, and this slide does not invent it. Decide your own reteach for each option before the lesson; the options above are the start of it.
+This is a real activity from the experience (pr-l02-s3-c4), so the wording here is the wording a pupil will see.</a:t>
             </a:r>
             <a:endParaRPr lang="en-US" dirty="0"/>
           </a:p>
@@ -780,7 +787,7 @@
           <a:p>
             <a:r>
               <a:rPr lang="en-US" dirty="0"/>
-              <a:t>Use these as a settler, or as something for early finishers to read in the experience.</a:t>
+              <a:t>Make them commit to an answer on paper before they tap the star. Guessing first costs them the learning.</a:t>
             </a:r>
             <a:endParaRPr lang="en-US" dirty="0"/>
           </a:p>
@@ -868,7 +875,7 @@
           <a:p>
             <a:r>
               <a:rPr lang="en-US" dirty="0"/>
-              <a:t>Timed and silent. Mark against the answer sheet, then ask students to record their weakest area.</a:t>
+              <a:t>Use these as a settler, or as something for early finishers to read in the experience.</a:t>
             </a:r>
             <a:endParaRPr lang="en-US" dirty="0"/>
           </a:p>
@@ -956,7 +963,7 @@
           <a:p>
             <a:r>
               <a:rPr lang="en-US" dirty="0"/>
-              <a:t>Students copy their score-screen breakdown onto the worksheet, then rate themselves here.</a:t>
+              <a:t>Timed and silent. Mark against the answer sheet, then ask students to record their weakest area.</a:t>
             </a:r>
             <a:endParaRPr lang="en-US" dirty="0"/>
           </a:p>
@@ -980,6 +987,94 @@
             <a:fld id="{F7021451-1387-4CA6-816F-3879F97B5CBC}" type="slidenum">
               <a:rPr lang="en-US"/>
               <a:t>14</a:t>
+            </a:fld>
+            <a:endParaRPr lang="en-US"/>
+          </a:p>
+        </p:txBody>
+      </p:sp>
+    </p:spTree>
+    <p:extLst>
+      <p:ext uri="{BB962C8B-B14F-4D97-AF65-F5344CB8AC3E}">
+        <p14:creationId xmlns:p14="http://schemas.microsoft.com/office/powerpoint/2010/main" val="1024086991"/>
+      </p:ext>
+    </p:extLst>
+  </p:cSld>
+  <p:clrMapOvr>
+    <a:masterClrMapping/>
+  </p:clrMapOvr>
+</p:notes>
+</file>
+
+<file path=ppt/notesSlides/notesSlide15.xml><?xml version="1.0" encoding="utf-8"?>
+<p:notes xmlns:a="http://schemas.openxmlformats.org/drawingml/2006/main" xmlns:r="http://schemas.openxmlformats.org/officeDocument/2006/relationships" xmlns:p="http://schemas.openxmlformats.org/presentationml/2006/main">
+  <p:cSld>
+    <p:spTree>
+      <p:nvGrpSpPr>
+        <p:cNvPr id="1" name=""/>
+        <p:cNvGrpSpPr/>
+        <p:nvPr/>
+      </p:nvGrpSpPr>
+      <p:grpSpPr>
+        <a:xfrm>
+          <a:off x="0" y="0"/>
+          <a:ext cx="0" cy="0"/>
+          <a:chOff x="0" y="0"/>
+          <a:chExt cx="0" cy="0"/>
+        </a:xfrm>
+      </p:grpSpPr>
+      <p:sp>
+        <p:nvSpPr>
+          <p:cNvPr id="2" name="Slide Image Placeholder 1"/>
+          <p:cNvSpPr>
+            <a:spLocks noGrp="1" noRot="1" noChangeAspect="1"/>
+          </p:cNvSpPr>
+          <p:nvPr>
+            <p:ph type="sldImg"/>
+          </p:nvPr>
+        </p:nvSpPr>
+        <p:spPr/>
+      </p:sp>
+      <p:sp>
+        <p:nvSpPr>
+          <p:cNvPr id="3" name="Notes Placeholder 2"/>
+          <p:cNvSpPr>
+            <a:spLocks noGrp="1"/>
+          </p:cNvSpPr>
+          <p:nvPr>
+            <p:ph type="body" idx="1"/>
+          </p:nvPr>
+        </p:nvSpPr>
+        <p:spPr/>
+        <p:txBody>
+          <a:bodyPr/>
+          <a:lstStyle/>
+          <a:p>
+            <a:r>
+              <a:rPr lang="en-US" dirty="0"/>
+              <a:t>Students copy their score-screen breakdown onto the worksheet, then rate themselves here.</a:t>
+            </a:r>
+            <a:endParaRPr lang="en-US" dirty="0"/>
+          </a:p>
+        </p:txBody>
+      </p:sp>
+      <p:sp>
+        <p:nvSpPr>
+          <p:cNvPr id="4" name="Slide Number Placeholder 3"/>
+          <p:cNvSpPr>
+            <a:spLocks noGrp="1"/>
+          </p:cNvSpPr>
+          <p:nvPr>
+            <p:ph type="sldNum" sz="quarter" idx="10"/>
+          </p:nvPr>
+        </p:nvSpPr>
+        <p:spPr/>
+        <p:txBody>
+          <a:bodyPr/>
+          <a:lstStyle/>
+          <a:p>
+            <a:fld id="{F7021451-1387-4CA6-816F-3879F97B5CBC}" type="slidenum">
+              <a:rPr lang="en-US"/>
+              <a:t>15</a:t>
             </a:fld>
             <a:endParaRPr lang="en-US"/>
           </a:p>
@@ -2949,12 +3044,12 @@
         </p:nvSpPr>
         <p:spPr>
           <a:xfrm>
-            <a:off x="502920" y="438912"/>
-            <a:ext cx="3108960" cy="502920"/>
+            <a:off x="502920" y="457200"/>
+            <a:ext cx="1051560" cy="420624"/>
           </a:xfrm>
           <a:prstGeom prst="roundRect">
             <a:avLst>
-              <a:gd name="adj" fmla="val 18182"/>
+              <a:gd name="adj" fmla="val 21739"/>
             </a:avLst>
           </a:prstGeom>
           <a:solidFill>
@@ -2971,8 +3066,8 @@
         </p:nvSpPr>
         <p:spPr>
           <a:xfrm>
-            <a:off x="502920" y="438912"/>
-            <a:ext cx="3108960" cy="502920"/>
+            <a:off x="502920" y="457200"/>
+            <a:ext cx="1051560" cy="420624"/>
           </a:xfrm>
           <a:prstGeom prst="rect">
             <a:avLst/>
@@ -2988,7 +3083,7 @@
               <a:buNone/>
             </a:pPr>
             <a:r>
-              <a:rPr lang="en-US" sz="1300" b="1" dirty="0">
+              <a:rPr lang="en-US" sz="1200" b="1" dirty="0">
                 <a:solidFill>
                   <a:srgbClr val="101828"/>
                 </a:solidFill>
@@ -2996,9 +3091,9 @@
                 <a:ea typeface="IBM Plex Mono" pitchFamily="34" charset="-122"/>
                 <a:cs typeface="IBM Plex Mono" pitchFamily="34" charset="-120"/>
               </a:rPr>
-              <a:t>★  FINAL CHALLENGE</a:t>
-            </a:r>
-            <a:endParaRPr lang="en-US" sz="1300" dirty="0"/>
+              <a:t>CHECK</a:t>
+            </a:r>
+            <a:endParaRPr lang="en-US" sz="1200" dirty="0"/>
           </a:p>
         </p:txBody>
       </p:sp>
@@ -3010,8 +3105,8 @@
         </p:nvSpPr>
         <p:spPr>
           <a:xfrm>
-            <a:off x="502920" y="1097280"/>
-            <a:ext cx="11155680" cy="731520"/>
+            <a:off x="1737360" y="457200"/>
+            <a:ext cx="9875520" cy="420624"/>
           </a:xfrm>
           <a:prstGeom prst="rect">
             <a:avLst/>
@@ -3027,34 +3122,76 @@
               <a:buNone/>
             </a:pPr>
             <a:r>
-              <a:rPr lang="en-US" sz="3400" b="1" dirty="0">
-                <a:solidFill>
-                  <a:srgbClr val="101828"/>
+              <a:rPr lang="en-US" sz="1500" dirty="0">
+                <a:solidFill>
+                  <a:srgbClr val="667085"/>
                 </a:solidFill>
                 <a:latin typeface="IBM Plex Sans" pitchFamily="34" charset="0"/>
                 <a:ea typeface="IBM Plex Sans" pitchFamily="34" charset="-122"/>
                 <a:cs typeface="IBM Plex Sans" pitchFamily="34" charset="-120"/>
               </a:rPr>
-              <a:t>Pick the operator</a:t>
-            </a:r>
-            <a:endParaRPr lang="en-US" sz="3400" dirty="0"/>
-          </a:p>
-        </p:txBody>
-      </p:sp>
-      <p:sp>
-        <p:nvSpPr>
-          <p:cNvPr id="8" name="Shape 6"/>
+              <a:t>Hands down. Everyone commits.</a:t>
+            </a:r>
+            <a:endParaRPr lang="en-US" sz="1500" dirty="0"/>
+          </a:p>
+        </p:txBody>
+      </p:sp>
+      <p:sp>
+        <p:nvSpPr>
+          <p:cNvPr id="8" name="Text 6"/>
+          <p:cNvSpPr txBox="1"/>
+          <p:nvPr/>
+        </p:nvSpPr>
+        <p:spPr>
+          <a:xfrm>
+            <a:off x="502920" y="1097280"/>
+            <a:ext cx="11155680" cy="914400"/>
+          </a:xfrm>
+          <a:prstGeom prst="rect">
+            <a:avLst/>
+          </a:prstGeom>
+          <a:noFill/>
+          <a:ln/>
+        </p:spPr>
+        <p:txBody>
+          <a:bodyPr wrap="square" lIns="0" tIns="0" rIns="0" bIns="0" rtlCol="0" anchor="ctr"/>
+          <a:lstStyle/>
+          <a:p>
+            <a:pPr indent="0" marL="0">
+              <a:lnSpc>
+                <a:spcPct val="115000"/>
+              </a:lnSpc>
+              <a:buNone/>
+            </a:pPr>
+            <a:r>
+              <a:rPr lang="en-US" sz="2600" b="1" dirty="0">
+                <a:solidFill>
+                  <a:srgbClr val="101828"/>
+                </a:solidFill>
+                <a:latin typeface="IBM Plex Sans" pitchFamily="34" charset="0"/>
+                <a:ea typeface="IBM Plex Sans" pitchFamily="34" charset="-122"/>
+                <a:cs typeface="IBM Plex Sans" pitchFamily="34" charset="-120"/>
+              </a:rPr>
+              <a:t>What will this program display?</a:t>
+            </a:r>
+            <a:endParaRPr lang="en-US" sz="2600" dirty="0"/>
+          </a:p>
+        </p:txBody>
+      </p:sp>
+      <p:sp>
+        <p:nvSpPr>
+          <p:cNvPr id="9" name="Shape 7"/>
           <p:cNvSpPr/>
           <p:nvPr/>
         </p:nvSpPr>
         <p:spPr>
           <a:xfrm>
-            <a:off x="502920" y="2011680"/>
-            <a:ext cx="11155680" cy="2194560"/>
+            <a:off x="502920" y="2148840"/>
+            <a:ext cx="5029200" cy="731520"/>
           </a:xfrm>
           <a:prstGeom prst="roundRect">
             <a:avLst>
-              <a:gd name="adj" fmla="val 5000"/>
+              <a:gd name="adj" fmla="val 15000"/>
             </a:avLst>
           </a:prstGeom>
           <a:solidFill>
@@ -3062,7 +3199,7 @@
           </a:solidFill>
           <a:ln w="15875">
             <a:solidFill>
-              <a:srgbClr val="2D63FF"/>
+              <a:srgbClr val="D9DEE7"/>
             </a:solidFill>
             <a:prstDash val="solid"/>
           </a:ln>
@@ -3070,33 +3207,163 @@
       </p:sp>
       <p:sp>
         <p:nvSpPr>
-          <p:cNvPr id="9" name="Text 7"/>
-          <p:cNvSpPr txBox="1"/>
-          <p:nvPr/>
-        </p:nvSpPr>
-        <p:spPr>
-          <a:xfrm>
-            <a:off x="1005840" y="2331720"/>
-            <a:ext cx="10149840" cy="1554480"/>
-          </a:xfrm>
-          <a:prstGeom prst="rect">
-            <a:avLst/>
-          </a:prstGeom>
-          <a:noFill/>
-          <a:ln/>
-        </p:spPr>
-        <p:txBody>
-          <a:bodyPr wrap="square" lIns="0" tIns="0" rIns="0" bIns="0" rtlCol="0" anchor="ctr"/>
+          <p:cNvPr id="10" name="Text 8"/>
+          <p:cNvSpPr txBox="1"/>
+          <p:nvPr/>
+        </p:nvSpPr>
+        <p:spPr>
+          <a:xfrm>
+            <a:off x="822960" y="2350008"/>
+            <a:ext cx="4480560" cy="329184"/>
+          </a:xfrm>
+          <a:prstGeom prst="rect">
+            <a:avLst/>
+          </a:prstGeom>
+          <a:noFill/>
+          <a:ln/>
+        </p:spPr>
+        <p:txBody>
+          <a:bodyPr wrap="square" lIns="0" tIns="0" rIns="0" bIns="0" rtlCol="0" anchor="t"/>
           <a:lstStyle/>
           <a:p>
             <a:pPr indent="0" marL="0">
               <a:lnSpc>
-                <a:spcPct val="130000"/>
+                <a:spcPct val="125000"/>
               </a:lnSpc>
               <a:buNone/>
             </a:pPr>
             <a:r>
-              <a:rPr lang="en-US" sz="2200" dirty="0">
+              <a:rPr lang="en-US" sz="1500" dirty="0">
+                <a:solidFill>
+                  <a:srgbClr val="101828"/>
+                </a:solidFill>
+                <a:latin typeface="IBM Plex Mono" pitchFamily="34" charset="0"/>
+                <a:ea typeface="IBM Plex Mono" pitchFamily="34" charset="-122"/>
+                <a:cs typeface="IBM Plex Mono" pitchFamily="34" charset="-120"/>
+              </a:rPr>
+              <a:t>print(25 ** 0.5)</a:t>
+            </a:r>
+            <a:endParaRPr lang="en-US" sz="1500" dirty="0"/>
+          </a:p>
+        </p:txBody>
+      </p:sp>
+      <p:sp>
+        <p:nvSpPr>
+          <p:cNvPr id="11" name="Shape 9"/>
+          <p:cNvSpPr/>
+          <p:nvPr/>
+        </p:nvSpPr>
+        <p:spPr>
+          <a:xfrm>
+            <a:off x="5806440" y="2148840"/>
+            <a:ext cx="5852160" cy="731520"/>
+          </a:xfrm>
+          <a:prstGeom prst="roundRect">
+            <a:avLst>
+              <a:gd name="adj" fmla="val 15000"/>
+            </a:avLst>
+          </a:prstGeom>
+          <a:solidFill>
+            <a:srgbClr val="FFFFFF"/>
+          </a:solidFill>
+          <a:ln w="15875">
+            <a:solidFill>
+              <a:srgbClr val="D9DEE7"/>
+            </a:solidFill>
+            <a:prstDash val="solid"/>
+          </a:ln>
+        </p:spPr>
+      </p:sp>
+      <p:sp>
+        <p:nvSpPr>
+          <p:cNvPr id="12" name="Shape 10"/>
+          <p:cNvSpPr/>
+          <p:nvPr/>
+        </p:nvSpPr>
+        <p:spPr>
+          <a:xfrm>
+            <a:off x="6080760" y="2295144"/>
+            <a:ext cx="438912" cy="438912"/>
+          </a:xfrm>
+          <a:prstGeom prst="roundRect">
+            <a:avLst>
+              <a:gd name="adj" fmla="val 20833"/>
+            </a:avLst>
+          </a:prstGeom>
+          <a:solidFill>
+            <a:srgbClr val="EEF2FB"/>
+          </a:solidFill>
+          <a:ln/>
+        </p:spPr>
+      </p:sp>
+      <p:sp>
+        <p:nvSpPr>
+          <p:cNvPr id="13" name="Text 11"/>
+          <p:cNvSpPr txBox="1"/>
+          <p:nvPr/>
+        </p:nvSpPr>
+        <p:spPr>
+          <a:xfrm>
+            <a:off x="6080760" y="2295144"/>
+            <a:ext cx="438912" cy="438912"/>
+          </a:xfrm>
+          <a:prstGeom prst="rect">
+            <a:avLst/>
+          </a:prstGeom>
+          <a:noFill/>
+          <a:ln/>
+        </p:spPr>
+        <p:txBody>
+          <a:bodyPr wrap="square" lIns="0" tIns="0" rIns="0" bIns="0" rtlCol="0" anchor="ctr"/>
+          <a:lstStyle/>
+          <a:p>
+            <a:pPr algn="ctr" indent="0" marL="0">
+              <a:buNone/>
+            </a:pPr>
+            <a:r>
+              <a:rPr lang="en-US" sz="1300" b="1" dirty="0">
+                <a:solidFill>
+                  <a:srgbClr val="2D63FF"/>
+                </a:solidFill>
+                <a:latin typeface="IBM Plex Mono" pitchFamily="34" charset="0"/>
+                <a:ea typeface="IBM Plex Mono" pitchFamily="34" charset="-122"/>
+                <a:cs typeface="IBM Plex Mono" pitchFamily="34" charset="-120"/>
+              </a:rPr>
+              <a:t>A</a:t>
+            </a:r>
+            <a:endParaRPr lang="en-US" sz="1300" dirty="0"/>
+          </a:p>
+        </p:txBody>
+      </p:sp>
+      <p:sp>
+        <p:nvSpPr>
+          <p:cNvPr id="14" name="Text 12"/>
+          <p:cNvSpPr txBox="1"/>
+          <p:nvPr/>
+        </p:nvSpPr>
+        <p:spPr>
+          <a:xfrm>
+            <a:off x="6720840" y="2148840"/>
+            <a:ext cx="4754880" cy="731520"/>
+          </a:xfrm>
+          <a:prstGeom prst="rect">
+            <a:avLst/>
+          </a:prstGeom>
+          <a:noFill/>
+          <a:ln/>
+        </p:spPr>
+        <p:txBody>
+          <a:bodyPr wrap="square" lIns="0" tIns="0" rIns="0" bIns="0" rtlCol="0" anchor="ctr"/>
+          <a:lstStyle/>
+          <a:p>
+            <a:pPr indent="0" marL="0">
+              <a:lnSpc>
+                <a:spcPct val="115000"/>
+              </a:lnSpc>
+              <a:buNone/>
+            </a:pPr>
+            <a:r>
+              <a:rPr lang="en-US" sz="1700" dirty="0">
                 <a:solidFill>
                   <a:srgbClr val="101828"/>
                 </a:solidFill>
@@ -3104,22 +3371,110 @@
                 <a:ea typeface="IBM Plex Sans" pitchFamily="34" charset="-122"/>
                 <a:cs typeface="IBM Plex Sans" pitchFamily="34" charset="-120"/>
               </a:rPr>
-              <a:t>Eight jobs are waiting on the floor below you. Tap the star and choose the operator or function each one needs.</a:t>
-            </a:r>
-            <a:endParaRPr lang="en-US" sz="2200" dirty="0"/>
-          </a:p>
-        </p:txBody>
-      </p:sp>
-      <p:sp>
-        <p:nvSpPr>
-          <p:cNvPr id="10" name="Text 8"/>
-          <p:cNvSpPr txBox="1"/>
-          <p:nvPr/>
-        </p:nvSpPr>
-        <p:spPr>
-          <a:xfrm>
-            <a:off x="502920" y="4526280"/>
-            <a:ext cx="11155680" cy="457200"/>
+              <a:t>12.5</a:t>
+            </a:r>
+            <a:endParaRPr lang="en-US" sz="1700" dirty="0"/>
+          </a:p>
+        </p:txBody>
+      </p:sp>
+      <p:sp>
+        <p:nvSpPr>
+          <p:cNvPr id="15" name="Shape 13"/>
+          <p:cNvSpPr/>
+          <p:nvPr/>
+        </p:nvSpPr>
+        <p:spPr>
+          <a:xfrm>
+            <a:off x="5806440" y="3017520"/>
+            <a:ext cx="5852160" cy="731520"/>
+          </a:xfrm>
+          <a:prstGeom prst="roundRect">
+            <a:avLst>
+              <a:gd name="adj" fmla="val 15000"/>
+            </a:avLst>
+          </a:prstGeom>
+          <a:solidFill>
+            <a:srgbClr val="FFFFFF"/>
+          </a:solidFill>
+          <a:ln w="15875">
+            <a:solidFill>
+              <a:srgbClr val="D9DEE7"/>
+            </a:solidFill>
+            <a:prstDash val="solid"/>
+          </a:ln>
+        </p:spPr>
+      </p:sp>
+      <p:sp>
+        <p:nvSpPr>
+          <p:cNvPr id="16" name="Shape 14"/>
+          <p:cNvSpPr/>
+          <p:nvPr/>
+        </p:nvSpPr>
+        <p:spPr>
+          <a:xfrm>
+            <a:off x="6080760" y="3163824"/>
+            <a:ext cx="438912" cy="438912"/>
+          </a:xfrm>
+          <a:prstGeom prst="roundRect">
+            <a:avLst>
+              <a:gd name="adj" fmla="val 20833"/>
+            </a:avLst>
+          </a:prstGeom>
+          <a:solidFill>
+            <a:srgbClr val="EEF2FB"/>
+          </a:solidFill>
+          <a:ln/>
+        </p:spPr>
+      </p:sp>
+      <p:sp>
+        <p:nvSpPr>
+          <p:cNvPr id="17" name="Text 15"/>
+          <p:cNvSpPr txBox="1"/>
+          <p:nvPr/>
+        </p:nvSpPr>
+        <p:spPr>
+          <a:xfrm>
+            <a:off x="6080760" y="3163824"/>
+            <a:ext cx="438912" cy="438912"/>
+          </a:xfrm>
+          <a:prstGeom prst="rect">
+            <a:avLst/>
+          </a:prstGeom>
+          <a:noFill/>
+          <a:ln/>
+        </p:spPr>
+        <p:txBody>
+          <a:bodyPr wrap="square" lIns="0" tIns="0" rIns="0" bIns="0" rtlCol="0" anchor="ctr"/>
+          <a:lstStyle/>
+          <a:p>
+            <a:pPr algn="ctr" indent="0" marL="0">
+              <a:buNone/>
+            </a:pPr>
+            <a:r>
+              <a:rPr lang="en-US" sz="1300" b="1" dirty="0">
+                <a:solidFill>
+                  <a:srgbClr val="2D63FF"/>
+                </a:solidFill>
+                <a:latin typeface="IBM Plex Mono" pitchFamily="34" charset="0"/>
+                <a:ea typeface="IBM Plex Mono" pitchFamily="34" charset="-122"/>
+                <a:cs typeface="IBM Plex Mono" pitchFamily="34" charset="-120"/>
+              </a:rPr>
+              <a:t>B</a:t>
+            </a:r>
+            <a:endParaRPr lang="en-US" sz="1300" dirty="0"/>
+          </a:p>
+        </p:txBody>
+      </p:sp>
+      <p:sp>
+        <p:nvSpPr>
+          <p:cNvPr id="18" name="Text 16"/>
+          <p:cNvSpPr txBox="1"/>
+          <p:nvPr/>
+        </p:nvSpPr>
+        <p:spPr>
+          <a:xfrm>
+            <a:off x="6720840" y="3017520"/>
+            <a:ext cx="4754880" cy="731520"/>
           </a:xfrm>
           <a:prstGeom prst="rect">
             <a:avLst/>
@@ -3132,20 +3487,153 @@
           <a:lstStyle/>
           <a:p>
             <a:pPr indent="0" marL="0">
-              <a:buNone/>
-            </a:pPr>
-            <a:r>
-              <a:rPr lang="en-US" sz="1600" dirty="0">
-                <a:solidFill>
-                  <a:srgbClr val="667085"/>
+              <a:lnSpc>
+                <a:spcPct val="115000"/>
+              </a:lnSpc>
+              <a:buNone/>
+            </a:pPr>
+            <a:r>
+              <a:rPr lang="en-US" sz="1700" dirty="0">
+                <a:solidFill>
+                  <a:srgbClr val="101828"/>
                 </a:solidFill>
                 <a:latin typeface="IBM Plex Sans" pitchFamily="34" charset="0"/>
                 <a:ea typeface="IBM Plex Sans" pitchFamily="34" charset="-122"/>
                 <a:cs typeface="IBM Plex Sans" pitchFamily="34" charset="-120"/>
               </a:rPr>
-              <a:t>Predict on paper first, then look down and test it.</a:t>
-            </a:r>
-            <a:endParaRPr lang="en-US" sz="1600" dirty="0"/>
+              <a:t>5.0</a:t>
+            </a:r>
+            <a:endParaRPr lang="en-US" sz="1700" dirty="0"/>
+          </a:p>
+        </p:txBody>
+      </p:sp>
+      <p:sp>
+        <p:nvSpPr>
+          <p:cNvPr id="19" name="Shape 17"/>
+          <p:cNvSpPr/>
+          <p:nvPr/>
+        </p:nvSpPr>
+        <p:spPr>
+          <a:xfrm>
+            <a:off x="5806440" y="3886200"/>
+            <a:ext cx="5852160" cy="731520"/>
+          </a:xfrm>
+          <a:prstGeom prst="roundRect">
+            <a:avLst>
+              <a:gd name="adj" fmla="val 15000"/>
+            </a:avLst>
+          </a:prstGeom>
+          <a:solidFill>
+            <a:srgbClr val="FFFFFF"/>
+          </a:solidFill>
+          <a:ln w="15875">
+            <a:solidFill>
+              <a:srgbClr val="D9DEE7"/>
+            </a:solidFill>
+            <a:prstDash val="solid"/>
+          </a:ln>
+        </p:spPr>
+      </p:sp>
+      <p:sp>
+        <p:nvSpPr>
+          <p:cNvPr id="20" name="Shape 18"/>
+          <p:cNvSpPr/>
+          <p:nvPr/>
+        </p:nvSpPr>
+        <p:spPr>
+          <a:xfrm>
+            <a:off x="6080760" y="4032504"/>
+            <a:ext cx="438912" cy="438912"/>
+          </a:xfrm>
+          <a:prstGeom prst="roundRect">
+            <a:avLst>
+              <a:gd name="adj" fmla="val 20833"/>
+            </a:avLst>
+          </a:prstGeom>
+          <a:solidFill>
+            <a:srgbClr val="EEF2FB"/>
+          </a:solidFill>
+          <a:ln/>
+        </p:spPr>
+      </p:sp>
+      <p:sp>
+        <p:nvSpPr>
+          <p:cNvPr id="21" name="Text 19"/>
+          <p:cNvSpPr txBox="1"/>
+          <p:nvPr/>
+        </p:nvSpPr>
+        <p:spPr>
+          <a:xfrm>
+            <a:off x="6080760" y="4032504"/>
+            <a:ext cx="438912" cy="438912"/>
+          </a:xfrm>
+          <a:prstGeom prst="rect">
+            <a:avLst/>
+          </a:prstGeom>
+          <a:noFill/>
+          <a:ln/>
+        </p:spPr>
+        <p:txBody>
+          <a:bodyPr wrap="square" lIns="0" tIns="0" rIns="0" bIns="0" rtlCol="0" anchor="ctr"/>
+          <a:lstStyle/>
+          <a:p>
+            <a:pPr algn="ctr" indent="0" marL="0">
+              <a:buNone/>
+            </a:pPr>
+            <a:r>
+              <a:rPr lang="en-US" sz="1300" b="1" dirty="0">
+                <a:solidFill>
+                  <a:srgbClr val="2D63FF"/>
+                </a:solidFill>
+                <a:latin typeface="IBM Plex Mono" pitchFamily="34" charset="0"/>
+                <a:ea typeface="IBM Plex Mono" pitchFamily="34" charset="-122"/>
+                <a:cs typeface="IBM Plex Mono" pitchFamily="34" charset="-120"/>
+              </a:rPr>
+              <a:t>C</a:t>
+            </a:r>
+            <a:endParaRPr lang="en-US" sz="1300" dirty="0"/>
+          </a:p>
+        </p:txBody>
+      </p:sp>
+      <p:sp>
+        <p:nvSpPr>
+          <p:cNvPr id="22" name="Text 20"/>
+          <p:cNvSpPr txBox="1"/>
+          <p:nvPr/>
+        </p:nvSpPr>
+        <p:spPr>
+          <a:xfrm>
+            <a:off x="6720840" y="3886200"/>
+            <a:ext cx="4754880" cy="731520"/>
+          </a:xfrm>
+          <a:prstGeom prst="rect">
+            <a:avLst/>
+          </a:prstGeom>
+          <a:noFill/>
+          <a:ln/>
+        </p:spPr>
+        <p:txBody>
+          <a:bodyPr wrap="square" lIns="0" tIns="0" rIns="0" bIns="0" rtlCol="0" anchor="ctr"/>
+          <a:lstStyle/>
+          <a:p>
+            <a:pPr indent="0" marL="0">
+              <a:lnSpc>
+                <a:spcPct val="115000"/>
+              </a:lnSpc>
+              <a:buNone/>
+            </a:pPr>
+            <a:r>
+              <a:rPr lang="en-US" sz="1700" dirty="0">
+                <a:solidFill>
+                  <a:srgbClr val="101828"/>
+                </a:solidFill>
+                <a:latin typeface="IBM Plex Sans" pitchFamily="34" charset="0"/>
+                <a:ea typeface="IBM Plex Sans" pitchFamily="34" charset="-122"/>
+                <a:cs typeface="IBM Plex Sans" pitchFamily="34" charset="-120"/>
+              </a:rPr>
+              <a:t>5</a:t>
+            </a:r>
+            <a:endParaRPr lang="en-US" sz="1700" dirty="0"/>
           </a:p>
         </p:txBody>
       </p:sp>
@@ -3281,14 +3769,75 @@
       </p:sp>
       <p:sp>
         <p:nvSpPr>
-          <p:cNvPr id="5" name="Text 3"/>
-          <p:cNvSpPr txBox="1"/>
-          <p:nvPr/>
-        </p:nvSpPr>
-        <p:spPr>
-          <a:xfrm>
-            <a:off x="502920" y="411480"/>
-            <a:ext cx="11155680" cy="777240"/>
+          <p:cNvPr id="5" name="Shape 3"/>
+          <p:cNvSpPr/>
+          <p:nvPr/>
+        </p:nvSpPr>
+        <p:spPr>
+          <a:xfrm>
+            <a:off x="502920" y="438912"/>
+            <a:ext cx="3108960" cy="502920"/>
+          </a:xfrm>
+          <a:prstGeom prst="roundRect">
+            <a:avLst>
+              <a:gd name="adj" fmla="val 18182"/>
+            </a:avLst>
+          </a:prstGeom>
+          <a:solidFill>
+            <a:srgbClr val="F4B942"/>
+          </a:solidFill>
+          <a:ln/>
+        </p:spPr>
+      </p:sp>
+      <p:sp>
+        <p:nvSpPr>
+          <p:cNvPr id="6" name="Text 4"/>
+          <p:cNvSpPr txBox="1"/>
+          <p:nvPr/>
+        </p:nvSpPr>
+        <p:spPr>
+          <a:xfrm>
+            <a:off x="502920" y="438912"/>
+            <a:ext cx="3108960" cy="502920"/>
+          </a:xfrm>
+          <a:prstGeom prst="rect">
+            <a:avLst/>
+          </a:prstGeom>
+          <a:noFill/>
+          <a:ln/>
+        </p:spPr>
+        <p:txBody>
+          <a:bodyPr wrap="square" lIns="0" tIns="0" rIns="0" bIns="0" rtlCol="0" anchor="ctr"/>
+          <a:lstStyle/>
+          <a:p>
+            <a:pPr algn="ctr" indent="0" marL="0">
+              <a:buNone/>
+            </a:pPr>
+            <a:r>
+              <a:rPr lang="en-US" sz="1300" b="1" dirty="0">
+                <a:solidFill>
+                  <a:srgbClr val="101828"/>
+                </a:solidFill>
+                <a:latin typeface="IBM Plex Mono" pitchFamily="34" charset="0"/>
+                <a:ea typeface="IBM Plex Mono" pitchFamily="34" charset="-122"/>
+                <a:cs typeface="IBM Plex Mono" pitchFamily="34" charset="-120"/>
+              </a:rPr>
+              <a:t>★  FINAL CHALLENGE</a:t>
+            </a:r>
+            <a:endParaRPr lang="en-US" sz="1300" dirty="0"/>
+          </a:p>
+        </p:txBody>
+      </p:sp>
+      <p:sp>
+        <p:nvSpPr>
+          <p:cNvPr id="7" name="Text 5"/>
+          <p:cNvSpPr txBox="1"/>
+          <p:nvPr/>
+        </p:nvSpPr>
+        <p:spPr>
+          <a:xfrm>
+            <a:off x="502920" y="1097280"/>
+            <a:ext cx="11155680" cy="731520"/>
           </a:xfrm>
           <a:prstGeom prst="rect">
             <a:avLst/>
@@ -3304,7 +3853,7 @@
               <a:buNone/>
             </a:pPr>
             <a:r>
-              <a:rPr lang="en-US" sz="3200" b="1" dirty="0">
+              <a:rPr lang="en-US" sz="3400" b="1" dirty="0">
                 <a:solidFill>
                   <a:srgbClr val="101828"/>
                 </a:solidFill>
@@ -3312,65 +3861,26 @@
                 <a:ea typeface="IBM Plex Sans" pitchFamily="34" charset="-122"/>
                 <a:cs typeface="IBM Plex Sans" pitchFamily="34" charset="-120"/>
               </a:rPr>
-              <a:t>Worth knowing</a:t>
-            </a:r>
-            <a:endParaRPr lang="en-US" sz="3200" dirty="0"/>
-          </a:p>
-        </p:txBody>
-      </p:sp>
-      <p:sp>
-        <p:nvSpPr>
-          <p:cNvPr id="6" name="Text 4"/>
-          <p:cNvSpPr txBox="1"/>
-          <p:nvPr/>
-        </p:nvSpPr>
-        <p:spPr>
-          <a:xfrm>
-            <a:off x="502920" y="1170432"/>
-            <a:ext cx="11155680" cy="411480"/>
-          </a:xfrm>
-          <a:prstGeom prst="rect">
-            <a:avLst/>
-          </a:prstGeom>
-          <a:noFill/>
-          <a:ln/>
-        </p:spPr>
-        <p:txBody>
-          <a:bodyPr wrap="square" lIns="0" tIns="0" rIns="0" bIns="0" rtlCol="0" anchor="ctr"/>
-          <a:lstStyle/>
-          <a:p>
-            <a:pPr indent="0" marL="0">
-              <a:buNone/>
-            </a:pPr>
-            <a:r>
-              <a:rPr lang="en-US" sz="1500" dirty="0">
-                <a:solidFill>
-                  <a:srgbClr val="667085"/>
-                </a:solidFill>
-                <a:latin typeface="IBM Plex Sans" pitchFamily="34" charset="0"/>
-                <a:ea typeface="IBM Plex Sans" pitchFamily="34" charset="-122"/>
-                <a:cs typeface="IBM Plex Sans" pitchFamily="34" charset="-120"/>
-              </a:rPr>
-              <a:t>The information markers dotted around the room</a:t>
-            </a:r>
-            <a:endParaRPr lang="en-US" sz="1500" dirty="0"/>
-          </a:p>
-        </p:txBody>
-      </p:sp>
-      <p:sp>
-        <p:nvSpPr>
-          <p:cNvPr id="7" name="Shape 5"/>
+              <a:t>Pick the operator</a:t>
+            </a:r>
+            <a:endParaRPr lang="en-US" sz="3400" dirty="0"/>
+          </a:p>
+        </p:txBody>
+      </p:sp>
+      <p:sp>
+        <p:nvSpPr>
+          <p:cNvPr id="8" name="Shape 6"/>
           <p:cNvSpPr/>
           <p:nvPr/>
         </p:nvSpPr>
         <p:spPr>
           <a:xfrm>
-            <a:off x="502920" y="1828800"/>
-            <a:ext cx="5394960" cy="1737360"/>
+            <a:off x="502920" y="2011680"/>
+            <a:ext cx="11155680" cy="2194560"/>
           </a:xfrm>
           <a:prstGeom prst="roundRect">
             <a:avLst>
-              <a:gd name="adj" fmla="val 6316"/>
+              <a:gd name="adj" fmla="val 5000"/>
             </a:avLst>
           </a:prstGeom>
           <a:solidFill>
@@ -3386,14 +3896,14 @@
       </p:sp>
       <p:sp>
         <p:nvSpPr>
-          <p:cNvPr id="8" name="Text 6"/>
-          <p:cNvSpPr txBox="1"/>
-          <p:nvPr/>
-        </p:nvSpPr>
-        <p:spPr>
-          <a:xfrm>
-            <a:off x="822960" y="2011680"/>
-            <a:ext cx="4754880" cy="365760"/>
+          <p:cNvPr id="9" name="Text 7"/>
+          <p:cNvSpPr txBox="1"/>
+          <p:nvPr/>
+        </p:nvSpPr>
+        <p:spPr>
+          <a:xfrm>
+            <a:off x="1005840" y="2331720"/>
+            <a:ext cx="10149840" cy="1554480"/>
           </a:xfrm>
           <a:prstGeom prst="rect">
             <a:avLst/>
@@ -3406,52 +3916,52 @@
           <a:lstStyle/>
           <a:p>
             <a:pPr indent="0" marL="0">
-              <a:buNone/>
-            </a:pPr>
-            <a:r>
-              <a:rPr lang="en-US" sz="1600" b="1" dirty="0">
-                <a:solidFill>
-                  <a:srgbClr val="2D63FF"/>
+              <a:lnSpc>
+                <a:spcPct val="130000"/>
+              </a:lnSpc>
+              <a:buNone/>
+            </a:pPr>
+            <a:r>
+              <a:rPr lang="en-US" sz="2200" dirty="0">
+                <a:solidFill>
+                  <a:srgbClr val="101828"/>
                 </a:solidFill>
                 <a:latin typeface="IBM Plex Sans" pitchFamily="34" charset="0"/>
                 <a:ea typeface="IBM Plex Sans" pitchFamily="34" charset="-122"/>
                 <a:cs typeface="IBM Plex Sans" pitchFamily="34" charset="-120"/>
               </a:rPr>
-              <a:t>Dividing by zero</a:t>
-            </a:r>
-            <a:endParaRPr lang="en-US" sz="1600" dirty="0"/>
-          </a:p>
-        </p:txBody>
-      </p:sp>
-      <p:sp>
-        <p:nvSpPr>
-          <p:cNvPr id="9" name="Text 7"/>
-          <p:cNvSpPr txBox="1"/>
-          <p:nvPr/>
-        </p:nvSpPr>
-        <p:spPr>
-          <a:xfrm>
-            <a:off x="822960" y="2395728"/>
-            <a:ext cx="4754880" cy="1005840"/>
-          </a:xfrm>
-          <a:prstGeom prst="rect">
-            <a:avLst/>
-          </a:prstGeom>
-          <a:noFill/>
-          <a:ln/>
-        </p:spPr>
-        <p:txBody>
-          <a:bodyPr wrap="square" lIns="0" tIns="0" rIns="0" bIns="0" rtlCol="0" anchor="t"/>
+              <a:t>Eight jobs are waiting on the floor below you. Tap the star and choose the operator or function each one needs.</a:t>
+            </a:r>
+            <a:endParaRPr lang="en-US" sz="2200" dirty="0"/>
+          </a:p>
+        </p:txBody>
+      </p:sp>
+      <p:sp>
+        <p:nvSpPr>
+          <p:cNvPr id="10" name="Text 8"/>
+          <p:cNvSpPr txBox="1"/>
+          <p:nvPr/>
+        </p:nvSpPr>
+        <p:spPr>
+          <a:xfrm>
+            <a:off x="502920" y="4526280"/>
+            <a:ext cx="11155680" cy="457200"/>
+          </a:xfrm>
+          <a:prstGeom prst="rect">
+            <a:avLst/>
+          </a:prstGeom>
+          <a:noFill/>
+          <a:ln/>
+        </p:spPr>
+        <p:txBody>
+          <a:bodyPr wrap="square" lIns="0" tIns="0" rIns="0" bIns="0" rtlCol="0" anchor="ctr"/>
           <a:lstStyle/>
           <a:p>
             <a:pPr indent="0" marL="0">
-              <a:lnSpc>
-                <a:spcPct val="120000"/>
-              </a:lnSpc>
-              <a:buNone/>
-            </a:pPr>
-            <a:r>
-              <a:rPr lang="en-US" sz="1300" dirty="0">
+              <a:buNone/>
+            </a:pPr>
+            <a:r>
+              <a:rPr lang="en-US" sz="1600" dirty="0">
                 <a:solidFill>
                   <a:srgbClr val="667085"/>
                 </a:solidFill>
@@ -3459,333 +3969,9 @@
                 <a:ea typeface="IBM Plex Sans" pitchFamily="34" charset="-122"/>
                 <a:cs typeface="IBM Plex Sans" pitchFamily="34" charset="-120"/>
               </a:rPr>
-              <a:t>Any program that divides by a number the user typed should check it is not zero first, or Python stops with an error.</a:t>
-            </a:r>
-            <a:endParaRPr lang="en-US" sz="1300" dirty="0"/>
-          </a:p>
-        </p:txBody>
-      </p:sp>
-      <p:sp>
-        <p:nvSpPr>
-          <p:cNvPr id="10" name="Shape 8"/>
-          <p:cNvSpPr/>
-          <p:nvPr/>
-        </p:nvSpPr>
-        <p:spPr>
-          <a:xfrm>
-            <a:off x="6217920" y="1828800"/>
-            <a:ext cx="5394960" cy="1737360"/>
-          </a:xfrm>
-          <a:prstGeom prst="roundRect">
-            <a:avLst>
-              <a:gd name="adj" fmla="val 6316"/>
-            </a:avLst>
-          </a:prstGeom>
-          <a:solidFill>
-            <a:srgbClr val="FFFFFF"/>
-          </a:solidFill>
-          <a:ln w="15875">
-            <a:solidFill>
-              <a:srgbClr val="08A6A6"/>
-            </a:solidFill>
-            <a:prstDash val="solid"/>
-          </a:ln>
-        </p:spPr>
-      </p:sp>
-      <p:sp>
-        <p:nvSpPr>
-          <p:cNvPr id="11" name="Text 9"/>
-          <p:cNvSpPr txBox="1"/>
-          <p:nvPr/>
-        </p:nvSpPr>
-        <p:spPr>
-          <a:xfrm>
-            <a:off x="6537960" y="2011680"/>
-            <a:ext cx="4754880" cy="365760"/>
-          </a:xfrm>
-          <a:prstGeom prst="rect">
-            <a:avLst/>
-          </a:prstGeom>
-          <a:noFill/>
-          <a:ln/>
-        </p:spPr>
-        <p:txBody>
-          <a:bodyPr wrap="square" lIns="0" tIns="0" rIns="0" bIns="0" rtlCol="0" anchor="ctr"/>
-          <a:lstStyle/>
-          <a:p>
-            <a:pPr indent="0" marL="0">
-              <a:buNone/>
-            </a:pPr>
-            <a:r>
-              <a:rPr lang="en-US" sz="1600" b="1" dirty="0">
-                <a:solidFill>
-                  <a:srgbClr val="08A6A6"/>
-                </a:solidFill>
-                <a:latin typeface="IBM Plex Sans" pitchFamily="34" charset="0"/>
-                <a:ea typeface="IBM Plex Sans" pitchFamily="34" charset="-122"/>
-                <a:cs typeface="IBM Plex Sans" pitchFamily="34" charset="-120"/>
-              </a:rPr>
-              <a:t>Clock arithmetic</a:t>
+              <a:t>Predict on paper first, then look down and test it.</a:t>
             </a:r>
             <a:endParaRPr lang="en-US" sz="1600" dirty="0"/>
-          </a:p>
-        </p:txBody>
-      </p:sp>
-      <p:sp>
-        <p:nvSpPr>
-          <p:cNvPr id="12" name="Text 10"/>
-          <p:cNvSpPr txBox="1"/>
-          <p:nvPr/>
-        </p:nvSpPr>
-        <p:spPr>
-          <a:xfrm>
-            <a:off x="6537960" y="2395728"/>
-            <a:ext cx="4754880" cy="1005840"/>
-          </a:xfrm>
-          <a:prstGeom prst="rect">
-            <a:avLst/>
-          </a:prstGeom>
-          <a:noFill/>
-          <a:ln/>
-        </p:spPr>
-        <p:txBody>
-          <a:bodyPr wrap="square" lIns="0" tIns="0" rIns="0" bIns="0" rtlCol="0" anchor="t"/>
-          <a:lstStyle/>
-          <a:p>
-            <a:pPr indent="0" marL="0">
-              <a:lnSpc>
-                <a:spcPct val="120000"/>
-              </a:lnSpc>
-              <a:buNone/>
-            </a:pPr>
-            <a:r>
-              <a:rPr lang="en-US" sz="1300" dirty="0">
-                <a:solidFill>
-                  <a:srgbClr val="667085"/>
-                </a:solidFill>
-                <a:latin typeface="IBM Plex Sans" pitchFamily="34" charset="0"/>
-                <a:ea typeface="IBM Plex Sans" pitchFamily="34" charset="-122"/>
-                <a:cs typeface="IBM Plex Sans" pitchFamily="34" charset="-120"/>
-              </a:rPr>
-              <a:t>% is how a program wraps round: hour 25 on a 24-hour clock is 25 % 24, which is 1.</a:t>
-            </a:r>
-            <a:endParaRPr lang="en-US" sz="1300" dirty="0"/>
-          </a:p>
-        </p:txBody>
-      </p:sp>
-      <p:sp>
-        <p:nvSpPr>
-          <p:cNvPr id="13" name="Shape 11"/>
-          <p:cNvSpPr/>
-          <p:nvPr/>
-        </p:nvSpPr>
-        <p:spPr>
-          <a:xfrm>
-            <a:off x="502920" y="3794760"/>
-            <a:ext cx="5394960" cy="1737360"/>
-          </a:xfrm>
-          <a:prstGeom prst="roundRect">
-            <a:avLst>
-              <a:gd name="adj" fmla="val 6316"/>
-            </a:avLst>
-          </a:prstGeom>
-          <a:solidFill>
-            <a:srgbClr val="FFFFFF"/>
-          </a:solidFill>
-          <a:ln w="15875">
-            <a:solidFill>
-              <a:srgbClr val="2D63FF"/>
-            </a:solidFill>
-            <a:prstDash val="solid"/>
-          </a:ln>
-        </p:spPr>
-      </p:sp>
-      <p:sp>
-        <p:nvSpPr>
-          <p:cNvPr id="14" name="Text 12"/>
-          <p:cNvSpPr txBox="1"/>
-          <p:nvPr/>
-        </p:nvSpPr>
-        <p:spPr>
-          <a:xfrm>
-            <a:off x="822960" y="3977640"/>
-            <a:ext cx="4754880" cy="365760"/>
-          </a:xfrm>
-          <a:prstGeom prst="rect">
-            <a:avLst/>
-          </a:prstGeom>
-          <a:noFill/>
-          <a:ln/>
-        </p:spPr>
-        <p:txBody>
-          <a:bodyPr wrap="square" lIns="0" tIns="0" rIns="0" bIns="0" rtlCol="0" anchor="ctr"/>
-          <a:lstStyle/>
-          <a:p>
-            <a:pPr indent="0" marL="0">
-              <a:buNone/>
-            </a:pPr>
-            <a:r>
-              <a:rPr lang="en-US" sz="1600" b="1" dirty="0">
-                <a:solidFill>
-                  <a:srgbClr val="2D63FF"/>
-                </a:solidFill>
-                <a:latin typeface="IBM Plex Sans" pitchFamily="34" charset="0"/>
-                <a:ea typeface="IBM Plex Sans" pitchFamily="34" charset="-122"/>
-                <a:cs typeface="IBM Plex Sans" pitchFamily="34" charset="-120"/>
-              </a:rPr>
-              <a:t>Any root at all</a:t>
-            </a:r>
-            <a:endParaRPr lang="en-US" sz="1600" dirty="0"/>
-          </a:p>
-        </p:txBody>
-      </p:sp>
-      <p:sp>
-        <p:nvSpPr>
-          <p:cNvPr id="15" name="Text 13"/>
-          <p:cNvSpPr txBox="1"/>
-          <p:nvPr/>
-        </p:nvSpPr>
-        <p:spPr>
-          <a:xfrm>
-            <a:off x="822960" y="4361688"/>
-            <a:ext cx="4754880" cy="1005840"/>
-          </a:xfrm>
-          <a:prstGeom prst="rect">
-            <a:avLst/>
-          </a:prstGeom>
-          <a:noFill/>
-          <a:ln/>
-        </p:spPr>
-        <p:txBody>
-          <a:bodyPr wrap="square" lIns="0" tIns="0" rIns="0" bIns="0" rtlCol="0" anchor="t"/>
-          <a:lstStyle/>
-          <a:p>
-            <a:pPr indent="0" marL="0">
-              <a:lnSpc>
-                <a:spcPct val="120000"/>
-              </a:lnSpc>
-              <a:buNone/>
-            </a:pPr>
-            <a:r>
-              <a:rPr lang="en-US" sz="1300" dirty="0">
-                <a:solidFill>
-                  <a:srgbClr val="667085"/>
-                </a:solidFill>
-                <a:latin typeface="IBM Plex Sans" pitchFamily="34" charset="0"/>
-                <a:ea typeface="IBM Plex Sans" pitchFamily="34" charset="-122"/>
-                <a:cs typeface="IBM Plex Sans" pitchFamily="34" charset="-120"/>
-              </a:rPr>
-              <a:t>Every root can be written as a power, so a cube root is the power of one third and 27 ** (1/3) is 3.</a:t>
-            </a:r>
-            <a:endParaRPr lang="en-US" sz="1300" dirty="0"/>
-          </a:p>
-        </p:txBody>
-      </p:sp>
-      <p:sp>
-        <p:nvSpPr>
-          <p:cNvPr id="16" name="Shape 14"/>
-          <p:cNvSpPr/>
-          <p:nvPr/>
-        </p:nvSpPr>
-        <p:spPr>
-          <a:xfrm>
-            <a:off x="6217920" y="3794760"/>
-            <a:ext cx="5394960" cy="1737360"/>
-          </a:xfrm>
-          <a:prstGeom prst="roundRect">
-            <a:avLst>
-              <a:gd name="adj" fmla="val 6316"/>
-            </a:avLst>
-          </a:prstGeom>
-          <a:solidFill>
-            <a:srgbClr val="FFFFFF"/>
-          </a:solidFill>
-          <a:ln w="15875">
-            <a:solidFill>
-              <a:srgbClr val="08A6A6"/>
-            </a:solidFill>
-            <a:prstDash val="solid"/>
-          </a:ln>
-        </p:spPr>
-      </p:sp>
-      <p:sp>
-        <p:nvSpPr>
-          <p:cNvPr id="17" name="Text 15"/>
-          <p:cNvSpPr txBox="1"/>
-          <p:nvPr/>
-        </p:nvSpPr>
-        <p:spPr>
-          <a:xfrm>
-            <a:off x="6537960" y="3977640"/>
-            <a:ext cx="4754880" cy="365760"/>
-          </a:xfrm>
-          <a:prstGeom prst="rect">
-            <a:avLst/>
-          </a:prstGeom>
-          <a:noFill/>
-          <a:ln/>
-        </p:spPr>
-        <p:txBody>
-          <a:bodyPr wrap="square" lIns="0" tIns="0" rIns="0" bIns="0" rtlCol="0" anchor="ctr"/>
-          <a:lstStyle/>
-          <a:p>
-            <a:pPr indent="0" marL="0">
-              <a:buNone/>
-            </a:pPr>
-            <a:r>
-              <a:rPr lang="en-US" sz="1600" b="1" dirty="0">
-                <a:solidFill>
-                  <a:srgbClr val="08A6A6"/>
-                </a:solidFill>
-                <a:latin typeface="IBM Plex Sans" pitchFamily="34" charset="0"/>
-                <a:ea typeface="IBM Plex Sans" pitchFamily="34" charset="-122"/>
-                <a:cs typeface="IBM Plex Sans" pitchFamily="34" charset="-120"/>
-              </a:rPr>
-              <a:t>Floats are close, not exact</a:t>
-            </a:r>
-            <a:endParaRPr lang="en-US" sz="1600" dirty="0"/>
-          </a:p>
-        </p:txBody>
-      </p:sp>
-      <p:sp>
-        <p:nvSpPr>
-          <p:cNvPr id="18" name="Text 16"/>
-          <p:cNvSpPr txBox="1"/>
-          <p:nvPr/>
-        </p:nvSpPr>
-        <p:spPr>
-          <a:xfrm>
-            <a:off x="6537960" y="4361688"/>
-            <a:ext cx="4754880" cy="1005840"/>
-          </a:xfrm>
-          <a:prstGeom prst="rect">
-            <a:avLst/>
-          </a:prstGeom>
-          <a:noFill/>
-          <a:ln/>
-        </p:spPr>
-        <p:txBody>
-          <a:bodyPr wrap="square" lIns="0" tIns="0" rIns="0" bIns="0" rtlCol="0" anchor="t"/>
-          <a:lstStyle/>
-          <a:p>
-            <a:pPr indent="0" marL="0">
-              <a:lnSpc>
-                <a:spcPct val="120000"/>
-              </a:lnSpc>
-              <a:buNone/>
-            </a:pPr>
-            <a:r>
-              <a:rPr lang="en-US" sz="1300" dirty="0">
-                <a:solidFill>
-                  <a:srgbClr val="667085"/>
-                </a:solidFill>
-                <a:latin typeface="IBM Plex Sans" pitchFamily="34" charset="0"/>
-                <a:ea typeface="IBM Plex Sans" pitchFamily="34" charset="-122"/>
-                <a:cs typeface="IBM Plex Sans" pitchFamily="34" charset="-120"/>
-              </a:rPr>
-              <a:t>0.1 + 0.2 does not give exactly 0.3, because a float is stored in binary and some decimals will not fit.</a:t>
-            </a:r>
-            <a:endParaRPr lang="en-US" sz="1300" dirty="0"/>
           </a:p>
         </p:txBody>
       </p:sp>
@@ -3952,7 +4138,7 @@
                 <a:ea typeface="IBM Plex Sans" pitchFamily="34" charset="-122"/>
                 <a:cs typeface="IBM Plex Sans" pitchFamily="34" charset="-120"/>
               </a:rPr>
-              <a:t>Exam practice</a:t>
+              <a:t>Worth knowing</a:t>
             </a:r>
             <a:endParaRPr lang="en-US" sz="3200" dirty="0"/>
           </a:p>
@@ -3991,7 +4177,7 @@
                 <a:ea typeface="IBM Plex Sans" pitchFamily="34" charset="-122"/>
                 <a:cs typeface="IBM Plex Sans" pitchFamily="34" charset="-120"/>
               </a:rPr>
-              <a:t>Devices away. Answer from memory on the worksheet.</a:t>
+              <a:t>The information markers dotted around the room</a:t>
             </a:r>
             <a:endParaRPr lang="en-US" sz="1500" dirty="0"/>
           </a:p>
@@ -4006,11 +4192,11 @@
         <p:spPr>
           <a:xfrm>
             <a:off x="502920" y="1828800"/>
-            <a:ext cx="11155680" cy="1097280"/>
+            <a:ext cx="5394960" cy="1737360"/>
           </a:xfrm>
           <a:prstGeom prst="roundRect">
             <a:avLst>
-              <a:gd name="adj" fmla="val 10000"/>
+              <a:gd name="adj" fmla="val 6316"/>
             </a:avLst>
           </a:prstGeom>
           <a:solidFill>
@@ -4018,7 +4204,7 @@
           </a:solidFill>
           <a:ln w="15875">
             <a:solidFill>
-              <a:srgbClr val="D9DEE7"/>
+              <a:srgbClr val="2D63FF"/>
             </a:solidFill>
             <a:prstDash val="solid"/>
           </a:ln>
@@ -4032,8 +4218,8 @@
         </p:nvSpPr>
         <p:spPr>
           <a:xfrm>
-            <a:off x="914400" y="1938528"/>
-            <a:ext cx="9418320" cy="877824"/>
+            <a:off x="822960" y="2011680"/>
+            <a:ext cx="4754880" cy="365760"/>
           </a:xfrm>
           <a:prstGeom prst="rect">
             <a:avLst/>
@@ -4046,271 +4232,79 @@
           <a:lstStyle/>
           <a:p>
             <a:pPr indent="0" marL="0">
-              <a:lnSpc>
-                <a:spcPct val="118000"/>
-              </a:lnSpc>
-              <a:buNone/>
-            </a:pPr>
-            <a:r>
-              <a:rPr lang="en-US" sz="1700" dirty="0">
-                <a:solidFill>
-                  <a:srgbClr val="101828"/>
+              <a:buNone/>
+            </a:pPr>
+            <a:r>
+              <a:rPr lang="en-US" sz="1600" b="1" dirty="0">
+                <a:solidFill>
+                  <a:srgbClr val="2D63FF"/>
                 </a:solidFill>
                 <a:latin typeface="IBM Plex Sans" pitchFamily="34" charset="0"/>
                 <a:ea typeface="IBM Plex Sans" pitchFamily="34" charset="-122"/>
                 <a:cs typeface="IBM Plex Sans" pitchFamily="34" charset="-120"/>
               </a:rPr>
-              <a:t>A program works out how many whole 6s go into a number, and the line reads </a:t>
-            </a:r>
+              <a:t>Dividing by zero</a:t>
+            </a:r>
+            <a:endParaRPr lang="en-US" sz="1600" dirty="0"/>
+          </a:p>
+        </p:txBody>
+      </p:sp>
+      <p:sp>
+        <p:nvSpPr>
+          <p:cNvPr id="9" name="Text 7"/>
+          <p:cNvSpPr txBox="1"/>
+          <p:nvPr/>
+        </p:nvSpPr>
+        <p:spPr>
+          <a:xfrm>
+            <a:off x="822960" y="2395728"/>
+            <a:ext cx="4754880" cy="1005840"/>
+          </a:xfrm>
+          <a:prstGeom prst="rect">
+            <a:avLst/>
+          </a:prstGeom>
+          <a:noFill/>
+          <a:ln/>
+        </p:spPr>
+        <p:txBody>
+          <a:bodyPr wrap="square" lIns="0" tIns="0" rIns="0" bIns="0" rtlCol="0" anchor="t"/>
+          <a:lstStyle/>
+          <a:p>
             <a:pPr indent="0" marL="0">
               <a:lnSpc>
-                <a:spcPct val="118000"/>
+                <a:spcPct val="120000"/>
               </a:lnSpc>
               <a:buNone/>
             </a:pPr>
             <a:r>
-              <a:rPr lang="en-US" sz="1700" dirty="0">
-                <a:solidFill>
-                  <a:srgbClr val="18181B"/>
-                </a:solidFill>
-                <a:latin typeface="IBM Plex Mono" pitchFamily="34" charset="0"/>
-                <a:ea typeface="IBM Plex Mono" pitchFamily="34" charset="-122"/>
-                <a:cs typeface="IBM Plex Mono" pitchFamily="34" charset="-120"/>
-              </a:rPr>
-              <a:t>lots</a:t>
-            </a:r>
-            <a:pPr indent="0" marL="0">
-              <a:lnSpc>
-                <a:spcPct val="118000"/>
-              </a:lnSpc>
-              <a:buNone/>
-            </a:pPr>
-            <a:r>
-              <a:rPr lang="en-US" sz="1700" dirty="0">
-                <a:solidFill>
-                  <a:srgbClr val="18181B"/>
-                </a:solidFill>
-                <a:latin typeface="IBM Plex Mono" pitchFamily="34" charset="0"/>
-                <a:ea typeface="IBM Plex Mono" pitchFamily="34" charset="-122"/>
-                <a:cs typeface="IBM Plex Mono" pitchFamily="34" charset="-120"/>
-              </a:rPr>
-              <a:t> </a:t>
-            </a:r>
-            <a:pPr indent="0" marL="0">
-              <a:lnSpc>
-                <a:spcPct val="118000"/>
-              </a:lnSpc>
-              <a:buNone/>
-            </a:pPr>
-            <a:r>
-              <a:rPr lang="en-US" sz="1700" dirty="0">
-                <a:solidFill>
-                  <a:srgbClr val="3F3F46"/>
-                </a:solidFill>
-                <a:latin typeface="IBM Plex Mono" pitchFamily="34" charset="0"/>
-                <a:ea typeface="IBM Plex Mono" pitchFamily="34" charset="-122"/>
-                <a:cs typeface="IBM Plex Mono" pitchFamily="34" charset="-120"/>
-              </a:rPr>
-              <a:t>=</a:t>
-            </a:r>
-            <a:pPr indent="0" marL="0">
-              <a:lnSpc>
-                <a:spcPct val="118000"/>
-              </a:lnSpc>
-              <a:buNone/>
-            </a:pPr>
-            <a:r>
-              <a:rPr lang="en-US" sz="1700" dirty="0">
-                <a:solidFill>
-                  <a:srgbClr val="18181B"/>
-                </a:solidFill>
-                <a:latin typeface="IBM Plex Mono" pitchFamily="34" charset="0"/>
-                <a:ea typeface="IBM Plex Mono" pitchFamily="34" charset="-122"/>
-                <a:cs typeface="IBM Plex Mono" pitchFamily="34" charset="-120"/>
-              </a:rPr>
-              <a:t> </a:t>
-            </a:r>
-            <a:pPr indent="0" marL="0">
-              <a:lnSpc>
-                <a:spcPct val="118000"/>
-              </a:lnSpc>
-              <a:buNone/>
-            </a:pPr>
-            <a:r>
-              <a:rPr lang="en-US" sz="1700" dirty="0">
-                <a:solidFill>
-                  <a:srgbClr val="18181B"/>
-                </a:solidFill>
-                <a:latin typeface="IBM Plex Mono" pitchFamily="34" charset="0"/>
-                <a:ea typeface="IBM Plex Mono" pitchFamily="34" charset="-122"/>
-                <a:cs typeface="IBM Plex Mono" pitchFamily="34" charset="-120"/>
-              </a:rPr>
-              <a:t>n</a:t>
-            </a:r>
-            <a:pPr indent="0" marL="0">
-              <a:lnSpc>
-                <a:spcPct val="118000"/>
-              </a:lnSpc>
-              <a:buNone/>
-            </a:pPr>
-            <a:r>
-              <a:rPr lang="en-US" sz="1700" dirty="0">
-                <a:solidFill>
-                  <a:srgbClr val="18181B"/>
-                </a:solidFill>
-                <a:latin typeface="IBM Plex Mono" pitchFamily="34" charset="0"/>
-                <a:ea typeface="IBM Plex Mono" pitchFamily="34" charset="-122"/>
-                <a:cs typeface="IBM Plex Mono" pitchFamily="34" charset="-120"/>
-              </a:rPr>
-              <a:t> </a:t>
-            </a:r>
-            <a:pPr indent="0" marL="0">
-              <a:lnSpc>
-                <a:spcPct val="118000"/>
-              </a:lnSpc>
-              <a:buNone/>
-            </a:pPr>
-            <a:r>
-              <a:rPr lang="en-US" sz="1700" dirty="0">
-                <a:solidFill>
-                  <a:srgbClr val="3F3F46"/>
-                </a:solidFill>
-                <a:latin typeface="IBM Plex Mono" pitchFamily="34" charset="0"/>
-                <a:ea typeface="IBM Plex Mono" pitchFamily="34" charset="-122"/>
-                <a:cs typeface="IBM Plex Mono" pitchFamily="34" charset="-120"/>
-              </a:rPr>
-              <a:t>/</a:t>
-            </a:r>
-            <a:pPr indent="0" marL="0">
-              <a:lnSpc>
-                <a:spcPct val="118000"/>
-              </a:lnSpc>
-              <a:buNone/>
-            </a:pPr>
-            <a:r>
-              <a:rPr lang="en-US" sz="1700" dirty="0">
-                <a:solidFill>
-                  <a:srgbClr val="18181B"/>
-                </a:solidFill>
-                <a:latin typeface="IBM Plex Mono" pitchFamily="34" charset="0"/>
-                <a:ea typeface="IBM Plex Mono" pitchFamily="34" charset="-122"/>
-                <a:cs typeface="IBM Plex Mono" pitchFamily="34" charset="-120"/>
-              </a:rPr>
-              <a:t> </a:t>
-            </a:r>
-            <a:pPr indent="0" marL="0">
-              <a:lnSpc>
-                <a:spcPct val="118000"/>
-              </a:lnSpc>
-              <a:buNone/>
-            </a:pPr>
-            <a:r>
-              <a:rPr lang="en-US" sz="1700" dirty="0">
-                <a:solidFill>
-                  <a:srgbClr val="9A3412"/>
-                </a:solidFill>
-                <a:latin typeface="IBM Plex Mono" pitchFamily="34" charset="0"/>
-                <a:ea typeface="IBM Plex Mono" pitchFamily="34" charset="-122"/>
-                <a:cs typeface="IBM Plex Mono" pitchFamily="34" charset="-120"/>
-              </a:rPr>
-              <a:t>6</a:t>
-            </a:r>
-            <a:pPr indent="0" marL="0">
-              <a:lnSpc>
-                <a:spcPct val="118000"/>
-              </a:lnSpc>
-              <a:buNone/>
-            </a:pPr>
-            <a:r>
-              <a:rPr lang="en-US" sz="1700" dirty="0">
-                <a:solidFill>
-                  <a:srgbClr val="101828"/>
+              <a:rPr lang="en-US" sz="1300" dirty="0">
+                <a:solidFill>
+                  <a:srgbClr val="667085"/>
                 </a:solidFill>
                 <a:latin typeface="IBM Plex Sans" pitchFamily="34" charset="0"/>
                 <a:ea typeface="IBM Plex Sans" pitchFamily="34" charset="-122"/>
                 <a:cs typeface="IBM Plex Sans" pitchFamily="34" charset="-120"/>
               </a:rPr>
-              <a:t>. State what is wrong with the result this gives, and write the line corrected.</a:t>
-            </a:r>
-            <a:endParaRPr lang="en-US" sz="1700" dirty="0"/>
-          </a:p>
-        </p:txBody>
-      </p:sp>
-      <p:sp>
-        <p:nvSpPr>
-          <p:cNvPr id="9" name="Shape 7"/>
+              <a:t>Any program that divides by a number the user typed should check it is not zero first, or Python stops with an error.</a:t>
+            </a:r>
+            <a:endParaRPr lang="en-US" sz="1300" dirty="0"/>
+          </a:p>
+        </p:txBody>
+      </p:sp>
+      <p:sp>
+        <p:nvSpPr>
+          <p:cNvPr id="10" name="Shape 8"/>
           <p:cNvSpPr/>
           <p:nvPr/>
         </p:nvSpPr>
         <p:spPr>
           <a:xfrm>
-            <a:off x="10515600" y="2130552"/>
-            <a:ext cx="868680" cy="493776"/>
+            <a:off x="6217920" y="1828800"/>
+            <a:ext cx="5394960" cy="1737360"/>
           </a:xfrm>
           <a:prstGeom prst="roundRect">
             <a:avLst>
-              <a:gd name="adj" fmla="val 18519"/>
-            </a:avLst>
-          </a:prstGeom>
-          <a:solidFill>
-            <a:srgbClr val="EEF2FB"/>
-          </a:solidFill>
-          <a:ln/>
-        </p:spPr>
-      </p:sp>
-      <p:sp>
-        <p:nvSpPr>
-          <p:cNvPr id="10" name="Text 8"/>
-          <p:cNvSpPr txBox="1"/>
-          <p:nvPr/>
-        </p:nvSpPr>
-        <p:spPr>
-          <a:xfrm>
-            <a:off x="10515600" y="2130552"/>
-            <a:ext cx="868680" cy="493776"/>
-          </a:xfrm>
-          <a:prstGeom prst="rect">
-            <a:avLst/>
-          </a:prstGeom>
-          <a:noFill/>
-          <a:ln/>
-        </p:spPr>
-        <p:txBody>
-          <a:bodyPr wrap="square" lIns="0" tIns="0" rIns="0" bIns="0" rtlCol="0" anchor="ctr"/>
-          <a:lstStyle/>
-          <a:p>
-            <a:pPr algn="ctr" indent="0" marL="0">
-              <a:buNone/>
-            </a:pPr>
-            <a:r>
-              <a:rPr lang="en-US" sz="1500" b="1" dirty="0">
-                <a:solidFill>
-                  <a:srgbClr val="2D63FF"/>
-                </a:solidFill>
-                <a:latin typeface="IBM Plex Mono" pitchFamily="34" charset="0"/>
-                <a:ea typeface="IBM Plex Mono" pitchFamily="34" charset="-122"/>
-                <a:cs typeface="IBM Plex Mono" pitchFamily="34" charset="-120"/>
-              </a:rPr>
-              <a:t>[2]</a:t>
-            </a:r>
-            <a:endParaRPr lang="en-US" sz="1500" dirty="0"/>
-          </a:p>
-        </p:txBody>
-      </p:sp>
-      <p:sp>
-        <p:nvSpPr>
-          <p:cNvPr id="11" name="Shape 9"/>
-          <p:cNvSpPr/>
-          <p:nvPr/>
-        </p:nvSpPr>
-        <p:spPr>
-          <a:xfrm>
-            <a:off x="502920" y="3127248"/>
-            <a:ext cx="11155680" cy="1097280"/>
-          </a:xfrm>
-          <a:prstGeom prst="roundRect">
-            <a:avLst>
-              <a:gd name="adj" fmla="val 10000"/>
+              <a:gd name="adj" fmla="val 6316"/>
             </a:avLst>
           </a:prstGeom>
           <a:solidFill>
@@ -4318,7 +4312,7 @@
           </a:solidFill>
           <a:ln w="15875">
             <a:solidFill>
-              <a:srgbClr val="D9DEE7"/>
+              <a:srgbClr val="08A6A6"/>
             </a:solidFill>
             <a:prstDash val="solid"/>
           </a:ln>
@@ -4326,14 +4320,14 @@
       </p:sp>
       <p:sp>
         <p:nvSpPr>
-          <p:cNvPr id="12" name="Text 10"/>
-          <p:cNvSpPr txBox="1"/>
-          <p:nvPr/>
-        </p:nvSpPr>
-        <p:spPr>
-          <a:xfrm>
-            <a:off x="914400" y="3236976"/>
-            <a:ext cx="9418320" cy="877824"/>
+          <p:cNvPr id="11" name="Text 9"/>
+          <p:cNvSpPr txBox="1"/>
+          <p:nvPr/>
+        </p:nvSpPr>
+        <p:spPr>
+          <a:xfrm>
+            <a:off x="6537960" y="2011680"/>
+            <a:ext cx="4754880" cy="365760"/>
           </a:xfrm>
           <a:prstGeom prst="rect">
             <a:avLst/>
@@ -4346,23 +4340,62 @@
           <a:lstStyle/>
           <a:p>
             <a:pPr indent="0" marL="0">
-              <a:lnSpc>
-                <a:spcPct val="118000"/>
-              </a:lnSpc>
-              <a:buNone/>
-            </a:pPr>
-            <a:r>
-              <a:rPr lang="en-US" sz="1700" dirty="0">
-                <a:solidFill>
-                  <a:srgbClr val="101828"/>
+              <a:buNone/>
+            </a:pPr>
+            <a:r>
+              <a:rPr lang="en-US" sz="1600" b="1" dirty="0">
+                <a:solidFill>
+                  <a:srgbClr val="08A6A6"/>
                 </a:solidFill>
                 <a:latin typeface="IBM Plex Sans" pitchFamily="34" charset="0"/>
                 <a:ea typeface="IBM Plex Sans" pitchFamily="34" charset="-122"/>
                 <a:cs typeface="IBM Plex Sans" pitchFamily="34" charset="-120"/>
               </a:rPr>
-              <a:t>Write a program that reads a whole number of pence and prints how many whole pounds are in it, then how many pence are left over on the next line.</a:t>
-            </a:r>
-            <a:endParaRPr lang="en-US" sz="1700" dirty="0"/>
+              <a:t>Clock arithmetic</a:t>
+            </a:r>
+            <a:endParaRPr lang="en-US" sz="1600" dirty="0"/>
+          </a:p>
+        </p:txBody>
+      </p:sp>
+      <p:sp>
+        <p:nvSpPr>
+          <p:cNvPr id="12" name="Text 10"/>
+          <p:cNvSpPr txBox="1"/>
+          <p:nvPr/>
+        </p:nvSpPr>
+        <p:spPr>
+          <a:xfrm>
+            <a:off x="6537960" y="2395728"/>
+            <a:ext cx="4754880" cy="1005840"/>
+          </a:xfrm>
+          <a:prstGeom prst="rect">
+            <a:avLst/>
+          </a:prstGeom>
+          <a:noFill/>
+          <a:ln/>
+        </p:spPr>
+        <p:txBody>
+          <a:bodyPr wrap="square" lIns="0" tIns="0" rIns="0" bIns="0" rtlCol="0" anchor="t"/>
+          <a:lstStyle/>
+          <a:p>
+            <a:pPr indent="0" marL="0">
+              <a:lnSpc>
+                <a:spcPct val="120000"/>
+              </a:lnSpc>
+              <a:buNone/>
+            </a:pPr>
+            <a:r>
+              <a:rPr lang="en-US" sz="1300" dirty="0">
+                <a:solidFill>
+                  <a:srgbClr val="667085"/>
+                </a:solidFill>
+                <a:latin typeface="IBM Plex Sans" pitchFamily="34" charset="0"/>
+                <a:ea typeface="IBM Plex Sans" pitchFamily="34" charset="-122"/>
+                <a:cs typeface="IBM Plex Sans" pitchFamily="34" charset="-120"/>
+              </a:rPr>
+              <a:t>% is how a program wraps round: hour 25 on a 24-hour clock is 25 % 24, which is 1.</a:t>
+            </a:r>
+            <a:endParaRPr lang="en-US" sz="1300" dirty="0"/>
           </a:p>
         </p:txBody>
       </p:sp>
@@ -4374,73 +4407,12 @@
         </p:nvSpPr>
         <p:spPr>
           <a:xfrm>
-            <a:off x="10515600" y="3429000"/>
-            <a:ext cx="868680" cy="493776"/>
+            <a:off x="502920" y="3794760"/>
+            <a:ext cx="5394960" cy="1737360"/>
           </a:xfrm>
           <a:prstGeom prst="roundRect">
             <a:avLst>
-              <a:gd name="adj" fmla="val 18519"/>
-            </a:avLst>
-          </a:prstGeom>
-          <a:solidFill>
-            <a:srgbClr val="EEF2FB"/>
-          </a:solidFill>
-          <a:ln/>
-        </p:spPr>
-      </p:sp>
-      <p:sp>
-        <p:nvSpPr>
-          <p:cNvPr id="14" name="Text 12"/>
-          <p:cNvSpPr txBox="1"/>
-          <p:nvPr/>
-        </p:nvSpPr>
-        <p:spPr>
-          <a:xfrm>
-            <a:off x="10515600" y="3429000"/>
-            <a:ext cx="868680" cy="493776"/>
-          </a:xfrm>
-          <a:prstGeom prst="rect">
-            <a:avLst/>
-          </a:prstGeom>
-          <a:noFill/>
-          <a:ln/>
-        </p:spPr>
-        <p:txBody>
-          <a:bodyPr wrap="square" lIns="0" tIns="0" rIns="0" bIns="0" rtlCol="0" anchor="ctr"/>
-          <a:lstStyle/>
-          <a:p>
-            <a:pPr algn="ctr" indent="0" marL="0">
-              <a:buNone/>
-            </a:pPr>
-            <a:r>
-              <a:rPr lang="en-US" sz="1500" b="1" dirty="0">
-                <a:solidFill>
-                  <a:srgbClr val="2D63FF"/>
-                </a:solidFill>
-                <a:latin typeface="IBM Plex Mono" pitchFamily="34" charset="0"/>
-                <a:ea typeface="IBM Plex Mono" pitchFamily="34" charset="-122"/>
-                <a:cs typeface="IBM Plex Mono" pitchFamily="34" charset="-120"/>
-              </a:rPr>
-              <a:t>[4]</a:t>
-            </a:r>
-            <a:endParaRPr lang="en-US" sz="1500" dirty="0"/>
-          </a:p>
-        </p:txBody>
-      </p:sp>
-      <p:sp>
-        <p:nvSpPr>
-          <p:cNvPr id="15" name="Shape 13"/>
-          <p:cNvSpPr/>
-          <p:nvPr/>
-        </p:nvSpPr>
-        <p:spPr>
-          <a:xfrm>
-            <a:off x="502920" y="4425696"/>
-            <a:ext cx="11155680" cy="1097280"/>
-          </a:xfrm>
-          <a:prstGeom prst="roundRect">
-            <a:avLst>
-              <a:gd name="adj" fmla="val 10000"/>
+              <a:gd name="adj" fmla="val 6316"/>
             </a:avLst>
           </a:prstGeom>
           <a:solidFill>
@@ -4448,7 +4420,7 @@
           </a:solidFill>
           <a:ln w="15875">
             <a:solidFill>
-              <a:srgbClr val="D9DEE7"/>
+              <a:srgbClr val="2D63FF"/>
             </a:solidFill>
             <a:prstDash val="solid"/>
           </a:ln>
@@ -4456,14 +4428,14 @@
       </p:sp>
       <p:sp>
         <p:nvSpPr>
-          <p:cNvPr id="16" name="Text 14"/>
-          <p:cNvSpPr txBox="1"/>
-          <p:nvPr/>
-        </p:nvSpPr>
-        <p:spPr>
-          <a:xfrm>
-            <a:off x="914400" y="4535424"/>
-            <a:ext cx="9418320" cy="877824"/>
+          <p:cNvPr id="14" name="Text 12"/>
+          <p:cNvSpPr txBox="1"/>
+          <p:nvPr/>
+        </p:nvSpPr>
+        <p:spPr>
+          <a:xfrm>
+            <a:off x="822960" y="3977640"/>
+            <a:ext cx="4754880" cy="365760"/>
           </a:xfrm>
           <a:prstGeom prst="rect">
             <a:avLst/>
@@ -4476,47 +4448,130 @@
           <a:lstStyle/>
           <a:p>
             <a:pPr indent="0" marL="0">
-              <a:lnSpc>
-                <a:spcPct val="118000"/>
-              </a:lnSpc>
-              <a:buNone/>
-            </a:pPr>
-            <a:r>
-              <a:rPr lang="en-US" sz="1700" dirty="0">
-                <a:solidFill>
-                  <a:srgbClr val="101828"/>
+              <a:buNone/>
+            </a:pPr>
+            <a:r>
+              <a:rPr lang="en-US" sz="1600" b="1" dirty="0">
+                <a:solidFill>
+                  <a:srgbClr val="2D63FF"/>
                 </a:solidFill>
                 <a:latin typeface="IBM Plex Sans" pitchFamily="34" charset="0"/>
                 <a:ea typeface="IBM Plex Sans" pitchFamily="34" charset="-122"/>
                 <a:cs typeface="IBM Plex Sans" pitchFamily="34" charset="-120"/>
               </a:rPr>
-              <a:t>Write a program that reads three whole numbers and prints their average, rounded to one decimal place.</a:t>
-            </a:r>
-            <a:endParaRPr lang="en-US" sz="1700" dirty="0"/>
-          </a:p>
-        </p:txBody>
-      </p:sp>
-      <p:sp>
-        <p:nvSpPr>
-          <p:cNvPr id="17" name="Shape 15"/>
+              <a:t>Any root at all</a:t>
+            </a:r>
+            <a:endParaRPr lang="en-US" sz="1600" dirty="0"/>
+          </a:p>
+        </p:txBody>
+      </p:sp>
+      <p:sp>
+        <p:nvSpPr>
+          <p:cNvPr id="15" name="Text 13"/>
+          <p:cNvSpPr txBox="1"/>
+          <p:nvPr/>
+        </p:nvSpPr>
+        <p:spPr>
+          <a:xfrm>
+            <a:off x="822960" y="4361688"/>
+            <a:ext cx="4754880" cy="1005840"/>
+          </a:xfrm>
+          <a:prstGeom prst="rect">
+            <a:avLst/>
+          </a:prstGeom>
+          <a:noFill/>
+          <a:ln/>
+        </p:spPr>
+        <p:txBody>
+          <a:bodyPr wrap="square" lIns="0" tIns="0" rIns="0" bIns="0" rtlCol="0" anchor="t"/>
+          <a:lstStyle/>
+          <a:p>
+            <a:pPr indent="0" marL="0">
+              <a:lnSpc>
+                <a:spcPct val="120000"/>
+              </a:lnSpc>
+              <a:buNone/>
+            </a:pPr>
+            <a:r>
+              <a:rPr lang="en-US" sz="1300" dirty="0">
+                <a:solidFill>
+                  <a:srgbClr val="667085"/>
+                </a:solidFill>
+                <a:latin typeface="IBM Plex Sans" pitchFamily="34" charset="0"/>
+                <a:ea typeface="IBM Plex Sans" pitchFamily="34" charset="-122"/>
+                <a:cs typeface="IBM Plex Sans" pitchFamily="34" charset="-120"/>
+              </a:rPr>
+              <a:t>Every root can be written as a power, so a cube root is the power of one third and 27 ** (1/3) is 3.</a:t>
+            </a:r>
+            <a:endParaRPr lang="en-US" sz="1300" dirty="0"/>
+          </a:p>
+        </p:txBody>
+      </p:sp>
+      <p:sp>
+        <p:nvSpPr>
+          <p:cNvPr id="16" name="Shape 14"/>
           <p:cNvSpPr/>
           <p:nvPr/>
         </p:nvSpPr>
         <p:spPr>
           <a:xfrm>
-            <a:off x="10515600" y="4727448"/>
-            <a:ext cx="868680" cy="493776"/>
+            <a:off x="6217920" y="3794760"/>
+            <a:ext cx="5394960" cy="1737360"/>
           </a:xfrm>
           <a:prstGeom prst="roundRect">
             <a:avLst>
-              <a:gd name="adj" fmla="val 18519"/>
+              <a:gd name="adj" fmla="val 6316"/>
             </a:avLst>
           </a:prstGeom>
           <a:solidFill>
-            <a:srgbClr val="EEF2FB"/>
+            <a:srgbClr val="FFFFFF"/>
           </a:solidFill>
-          <a:ln/>
-        </p:spPr>
+          <a:ln w="15875">
+            <a:solidFill>
+              <a:srgbClr val="08A6A6"/>
+            </a:solidFill>
+            <a:prstDash val="solid"/>
+          </a:ln>
+        </p:spPr>
+      </p:sp>
+      <p:sp>
+        <p:nvSpPr>
+          <p:cNvPr id="17" name="Text 15"/>
+          <p:cNvSpPr txBox="1"/>
+          <p:nvPr/>
+        </p:nvSpPr>
+        <p:spPr>
+          <a:xfrm>
+            <a:off x="6537960" y="3977640"/>
+            <a:ext cx="4754880" cy="365760"/>
+          </a:xfrm>
+          <a:prstGeom prst="rect">
+            <a:avLst/>
+          </a:prstGeom>
+          <a:noFill/>
+          <a:ln/>
+        </p:spPr>
+        <p:txBody>
+          <a:bodyPr wrap="square" lIns="0" tIns="0" rIns="0" bIns="0" rtlCol="0" anchor="ctr"/>
+          <a:lstStyle/>
+          <a:p>
+            <a:pPr indent="0" marL="0">
+              <a:buNone/>
+            </a:pPr>
+            <a:r>
+              <a:rPr lang="en-US" sz="1600" b="1" dirty="0">
+                <a:solidFill>
+                  <a:srgbClr val="08A6A6"/>
+                </a:solidFill>
+                <a:latin typeface="IBM Plex Sans" pitchFamily="34" charset="0"/>
+                <a:ea typeface="IBM Plex Sans" pitchFamily="34" charset="-122"/>
+                <a:cs typeface="IBM Plex Sans" pitchFamily="34" charset="-120"/>
+              </a:rPr>
+              <a:t>Floats are close, not exact</a:t>
+            </a:r>
+            <a:endParaRPr lang="en-US" sz="1600" dirty="0"/>
+          </a:p>
+        </p:txBody>
       </p:sp>
       <p:sp>
         <p:nvSpPr>
@@ -4526,34 +4581,37 @@
         </p:nvSpPr>
         <p:spPr>
           <a:xfrm>
-            <a:off x="10515600" y="4727448"/>
-            <a:ext cx="868680" cy="493776"/>
-          </a:xfrm>
-          <a:prstGeom prst="rect">
-            <a:avLst/>
-          </a:prstGeom>
-          <a:noFill/>
-          <a:ln/>
-        </p:spPr>
-        <p:txBody>
-          <a:bodyPr wrap="square" lIns="0" tIns="0" rIns="0" bIns="0" rtlCol="0" anchor="ctr"/>
-          <a:lstStyle/>
-          <a:p>
-            <a:pPr algn="ctr" indent="0" marL="0">
-              <a:buNone/>
-            </a:pPr>
-            <a:r>
-              <a:rPr lang="en-US" sz="1500" b="1" dirty="0">
-                <a:solidFill>
-                  <a:srgbClr val="2D63FF"/>
-                </a:solidFill>
-                <a:latin typeface="IBM Plex Mono" pitchFamily="34" charset="0"/>
-                <a:ea typeface="IBM Plex Mono" pitchFamily="34" charset="-122"/>
-                <a:cs typeface="IBM Plex Mono" pitchFamily="34" charset="-120"/>
-              </a:rPr>
-              <a:t>[4]</a:t>
-            </a:r>
-            <a:endParaRPr lang="en-US" sz="1500" dirty="0"/>
+            <a:off x="6537960" y="4361688"/>
+            <a:ext cx="4754880" cy="1005840"/>
+          </a:xfrm>
+          <a:prstGeom prst="rect">
+            <a:avLst/>
+          </a:prstGeom>
+          <a:noFill/>
+          <a:ln/>
+        </p:spPr>
+        <p:txBody>
+          <a:bodyPr wrap="square" lIns="0" tIns="0" rIns="0" bIns="0" rtlCol="0" anchor="t"/>
+          <a:lstStyle/>
+          <a:p>
+            <a:pPr indent="0" marL="0">
+              <a:lnSpc>
+                <a:spcPct val="120000"/>
+              </a:lnSpc>
+              <a:buNone/>
+            </a:pPr>
+            <a:r>
+              <a:rPr lang="en-US" sz="1300" dirty="0">
+                <a:solidFill>
+                  <a:srgbClr val="667085"/>
+                </a:solidFill>
+                <a:latin typeface="IBM Plex Sans" pitchFamily="34" charset="0"/>
+                <a:ea typeface="IBM Plex Sans" pitchFamily="34" charset="-122"/>
+                <a:cs typeface="IBM Plex Sans" pitchFamily="34" charset="-120"/>
+              </a:rPr>
+              <a:t>0.1 + 0.2 does not give exactly 0.3, because a float is stored in binary and some decimals will not fit.</a:t>
+            </a:r>
+            <a:endParaRPr lang="en-US" sz="1300" dirty="0"/>
           </a:p>
         </p:txBody>
       </p:sp>
@@ -4568,6 +4626,774 @@
 <file path=ppt/slides/slide14.xml><?xml version="1.0" encoding="utf-8"?>
 <p:sld xmlns:a="http://schemas.openxmlformats.org/drawingml/2006/main" xmlns:r="http://schemas.openxmlformats.org/officeDocument/2006/relationships" xmlns:p="http://schemas.openxmlformats.org/presentationml/2006/main">
   <p:cSld name="Slide 14">
+    <p:bg>
+      <p:bgPr>
+        <a:solidFill>
+          <a:srgbClr val="F7F7F4"/>
+        </a:solidFill>
+      </p:bgPr>
+    </p:bg>
+    <p:spTree>
+      <p:nvGrpSpPr>
+        <p:cNvPr id="1" name=""/>
+        <p:cNvGrpSpPr/>
+        <p:nvPr/>
+      </p:nvGrpSpPr>
+      <p:grpSpPr>
+        <a:xfrm>
+          <a:off x="0" y="0"/>
+          <a:ext cx="0" cy="0"/>
+          <a:chOff x="0" y="0"/>
+          <a:chExt cx="0" cy="0"/>
+        </a:xfrm>
+      </p:grpSpPr>
+      <p:sp>
+        <p:nvSpPr>
+          <p:cNvPr id="2" name="Shape 0"/>
+          <p:cNvSpPr/>
+          <p:nvPr/>
+        </p:nvSpPr>
+        <p:spPr>
+          <a:xfrm>
+            <a:off x="0" y="0"/>
+            <a:ext cx="12188952" cy="82296"/>
+          </a:xfrm>
+          <a:prstGeom prst="rect">
+            <a:avLst/>
+          </a:prstGeom>
+          <a:solidFill>
+            <a:srgbClr val="2D63FF"/>
+          </a:solidFill>
+          <a:ln/>
+        </p:spPr>
+      </p:sp>
+      <p:sp>
+        <p:nvSpPr>
+          <p:cNvPr id="3" name="Text 1"/>
+          <p:cNvSpPr txBox="1"/>
+          <p:nvPr/>
+        </p:nvSpPr>
+        <p:spPr>
+          <a:xfrm>
+            <a:off x="502920" y="6236208"/>
+            <a:ext cx="7772400" cy="365760"/>
+          </a:xfrm>
+          <a:prstGeom prst="rect">
+            <a:avLst/>
+          </a:prstGeom>
+          <a:noFill/>
+          <a:ln/>
+        </p:spPr>
+        <p:txBody>
+          <a:bodyPr wrap="square" lIns="0" tIns="0" rIns="0" bIns="0" rtlCol="0" anchor="ctr"/>
+          <a:lstStyle/>
+          <a:p>
+            <a:pPr indent="0" marL="0">
+              <a:buNone/>
+            </a:pPr>
+            <a:r>
+              <a:rPr lang="en-US" sz="1100" dirty="0">
+                <a:solidFill>
+                  <a:srgbClr val="667085"/>
+                </a:solidFill>
+                <a:latin typeface="IBM Plex Mono" pitchFamily="34" charset="0"/>
+                <a:ea typeface="IBM Plex Mono" pitchFamily="34" charset="-122"/>
+                <a:cs typeface="IBM Plex Mono" pitchFamily="34" charset="-120"/>
+              </a:rPr>
+              <a:t>Python programming  |  Lesson 2</a:t>
+            </a:r>
+            <a:endParaRPr lang="en-US" sz="1100" dirty="0"/>
+          </a:p>
+        </p:txBody>
+      </p:sp>
+      <p:sp>
+        <p:nvSpPr>
+          <p:cNvPr id="4" name="Text 2"/>
+          <p:cNvSpPr txBox="1"/>
+          <p:nvPr/>
+        </p:nvSpPr>
+        <p:spPr>
+          <a:xfrm>
+            <a:off x="9326880" y="6236208"/>
+            <a:ext cx="2377440" cy="365760"/>
+          </a:xfrm>
+          <a:prstGeom prst="rect">
+            <a:avLst/>
+          </a:prstGeom>
+          <a:noFill/>
+          <a:ln/>
+        </p:spPr>
+        <p:txBody>
+          <a:bodyPr wrap="square" lIns="0" tIns="0" rIns="0" bIns="0" rtlCol="0" anchor="ctr"/>
+          <a:lstStyle/>
+          <a:p>
+            <a:pPr algn="r" indent="0" marL="0">
+              <a:buNone/>
+            </a:pPr>
+            <a:r>
+              <a:rPr lang="en-US" sz="1100" dirty="0">
+                <a:solidFill>
+                  <a:srgbClr val="667085"/>
+                </a:solidFill>
+                <a:latin typeface="IBM Plex Mono" pitchFamily="34" charset="0"/>
+                <a:ea typeface="IBM Plex Mono" pitchFamily="34" charset="-122"/>
+                <a:cs typeface="IBM Plex Mono" pitchFamily="34" charset="-120"/>
+              </a:rPr>
+              <a:t>Revise 360</a:t>
+            </a:r>
+            <a:endParaRPr lang="en-US" sz="1100" dirty="0"/>
+          </a:p>
+        </p:txBody>
+      </p:sp>
+      <p:sp>
+        <p:nvSpPr>
+          <p:cNvPr id="5" name="Text 3"/>
+          <p:cNvSpPr txBox="1"/>
+          <p:nvPr/>
+        </p:nvSpPr>
+        <p:spPr>
+          <a:xfrm>
+            <a:off x="502920" y="411480"/>
+            <a:ext cx="11155680" cy="777240"/>
+          </a:xfrm>
+          <a:prstGeom prst="rect">
+            <a:avLst/>
+          </a:prstGeom>
+          <a:noFill/>
+          <a:ln/>
+        </p:spPr>
+        <p:txBody>
+          <a:bodyPr wrap="square" lIns="0" tIns="0" rIns="0" bIns="0" rtlCol="0" anchor="ctr"/>
+          <a:lstStyle/>
+          <a:p>
+            <a:pPr indent="0" marL="0">
+              <a:buNone/>
+            </a:pPr>
+            <a:r>
+              <a:rPr lang="en-US" sz="3200" b="1" dirty="0">
+                <a:solidFill>
+                  <a:srgbClr val="101828"/>
+                </a:solidFill>
+                <a:latin typeface="IBM Plex Sans" pitchFamily="34" charset="0"/>
+                <a:ea typeface="IBM Plex Sans" pitchFamily="34" charset="-122"/>
+                <a:cs typeface="IBM Plex Sans" pitchFamily="34" charset="-120"/>
+              </a:rPr>
+              <a:t>Exam practice</a:t>
+            </a:r>
+            <a:endParaRPr lang="en-US" sz="3200" dirty="0"/>
+          </a:p>
+        </p:txBody>
+      </p:sp>
+      <p:sp>
+        <p:nvSpPr>
+          <p:cNvPr id="6" name="Text 4"/>
+          <p:cNvSpPr txBox="1"/>
+          <p:nvPr/>
+        </p:nvSpPr>
+        <p:spPr>
+          <a:xfrm>
+            <a:off x="502920" y="1170432"/>
+            <a:ext cx="11155680" cy="411480"/>
+          </a:xfrm>
+          <a:prstGeom prst="rect">
+            <a:avLst/>
+          </a:prstGeom>
+          <a:noFill/>
+          <a:ln/>
+        </p:spPr>
+        <p:txBody>
+          <a:bodyPr wrap="square" lIns="0" tIns="0" rIns="0" bIns="0" rtlCol="0" anchor="ctr"/>
+          <a:lstStyle/>
+          <a:p>
+            <a:pPr indent="0" marL="0">
+              <a:buNone/>
+            </a:pPr>
+            <a:r>
+              <a:rPr lang="en-US" sz="1500" dirty="0">
+                <a:solidFill>
+                  <a:srgbClr val="667085"/>
+                </a:solidFill>
+                <a:latin typeface="IBM Plex Sans" pitchFamily="34" charset="0"/>
+                <a:ea typeface="IBM Plex Sans" pitchFamily="34" charset="-122"/>
+                <a:cs typeface="IBM Plex Sans" pitchFamily="34" charset="-120"/>
+              </a:rPr>
+              <a:t>Devices away. Answer from memory on the worksheet.</a:t>
+            </a:r>
+            <a:endParaRPr lang="en-US" sz="1500" dirty="0"/>
+          </a:p>
+        </p:txBody>
+      </p:sp>
+      <p:sp>
+        <p:nvSpPr>
+          <p:cNvPr id="7" name="Shape 5"/>
+          <p:cNvSpPr/>
+          <p:nvPr/>
+        </p:nvSpPr>
+        <p:spPr>
+          <a:xfrm>
+            <a:off x="502920" y="1828800"/>
+            <a:ext cx="11155680" cy="1097280"/>
+          </a:xfrm>
+          <a:prstGeom prst="roundRect">
+            <a:avLst>
+              <a:gd name="adj" fmla="val 10000"/>
+            </a:avLst>
+          </a:prstGeom>
+          <a:solidFill>
+            <a:srgbClr val="FFFFFF"/>
+          </a:solidFill>
+          <a:ln w="15875">
+            <a:solidFill>
+              <a:srgbClr val="D9DEE7"/>
+            </a:solidFill>
+            <a:prstDash val="solid"/>
+          </a:ln>
+        </p:spPr>
+      </p:sp>
+      <p:sp>
+        <p:nvSpPr>
+          <p:cNvPr id="8" name="Text 6"/>
+          <p:cNvSpPr txBox="1"/>
+          <p:nvPr/>
+        </p:nvSpPr>
+        <p:spPr>
+          <a:xfrm>
+            <a:off x="914400" y="1938528"/>
+            <a:ext cx="9418320" cy="877824"/>
+          </a:xfrm>
+          <a:prstGeom prst="rect">
+            <a:avLst/>
+          </a:prstGeom>
+          <a:noFill/>
+          <a:ln/>
+        </p:spPr>
+        <p:txBody>
+          <a:bodyPr wrap="square" lIns="0" tIns="0" rIns="0" bIns="0" rtlCol="0" anchor="ctr"/>
+          <a:lstStyle/>
+          <a:p>
+            <a:pPr indent="0" marL="0">
+              <a:lnSpc>
+                <a:spcPct val="118000"/>
+              </a:lnSpc>
+              <a:buNone/>
+            </a:pPr>
+            <a:r>
+              <a:rPr lang="en-US" sz="1700" dirty="0">
+                <a:solidFill>
+                  <a:srgbClr val="101828"/>
+                </a:solidFill>
+                <a:latin typeface="IBM Plex Sans" pitchFamily="34" charset="0"/>
+                <a:ea typeface="IBM Plex Sans" pitchFamily="34" charset="-122"/>
+                <a:cs typeface="IBM Plex Sans" pitchFamily="34" charset="-120"/>
+              </a:rPr>
+              <a:t>A program works out how many whole 6s go into a number, and the line reads </a:t>
+            </a:r>
+            <a:pPr indent="0" marL="0">
+              <a:lnSpc>
+                <a:spcPct val="118000"/>
+              </a:lnSpc>
+              <a:buNone/>
+            </a:pPr>
+            <a:r>
+              <a:rPr lang="en-US" sz="1700" dirty="0">
+                <a:solidFill>
+                  <a:srgbClr val="18181B"/>
+                </a:solidFill>
+                <a:latin typeface="IBM Plex Mono" pitchFamily="34" charset="0"/>
+                <a:ea typeface="IBM Plex Mono" pitchFamily="34" charset="-122"/>
+                <a:cs typeface="IBM Plex Mono" pitchFamily="34" charset="-120"/>
+              </a:rPr>
+              <a:t>lots</a:t>
+            </a:r>
+            <a:pPr indent="0" marL="0">
+              <a:lnSpc>
+                <a:spcPct val="118000"/>
+              </a:lnSpc>
+              <a:buNone/>
+            </a:pPr>
+            <a:r>
+              <a:rPr lang="en-US" sz="1700" dirty="0">
+                <a:solidFill>
+                  <a:srgbClr val="18181B"/>
+                </a:solidFill>
+                <a:latin typeface="IBM Plex Mono" pitchFamily="34" charset="0"/>
+                <a:ea typeface="IBM Plex Mono" pitchFamily="34" charset="-122"/>
+                <a:cs typeface="IBM Plex Mono" pitchFamily="34" charset="-120"/>
+              </a:rPr>
+              <a:t> </a:t>
+            </a:r>
+            <a:pPr indent="0" marL="0">
+              <a:lnSpc>
+                <a:spcPct val="118000"/>
+              </a:lnSpc>
+              <a:buNone/>
+            </a:pPr>
+            <a:r>
+              <a:rPr lang="en-US" sz="1700" dirty="0">
+                <a:solidFill>
+                  <a:srgbClr val="3F3F46"/>
+                </a:solidFill>
+                <a:latin typeface="IBM Plex Mono" pitchFamily="34" charset="0"/>
+                <a:ea typeface="IBM Plex Mono" pitchFamily="34" charset="-122"/>
+                <a:cs typeface="IBM Plex Mono" pitchFamily="34" charset="-120"/>
+              </a:rPr>
+              <a:t>=</a:t>
+            </a:r>
+            <a:pPr indent="0" marL="0">
+              <a:lnSpc>
+                <a:spcPct val="118000"/>
+              </a:lnSpc>
+              <a:buNone/>
+            </a:pPr>
+            <a:r>
+              <a:rPr lang="en-US" sz="1700" dirty="0">
+                <a:solidFill>
+                  <a:srgbClr val="18181B"/>
+                </a:solidFill>
+                <a:latin typeface="IBM Plex Mono" pitchFamily="34" charset="0"/>
+                <a:ea typeface="IBM Plex Mono" pitchFamily="34" charset="-122"/>
+                <a:cs typeface="IBM Plex Mono" pitchFamily="34" charset="-120"/>
+              </a:rPr>
+              <a:t> </a:t>
+            </a:r>
+            <a:pPr indent="0" marL="0">
+              <a:lnSpc>
+                <a:spcPct val="118000"/>
+              </a:lnSpc>
+              <a:buNone/>
+            </a:pPr>
+            <a:r>
+              <a:rPr lang="en-US" sz="1700" dirty="0">
+                <a:solidFill>
+                  <a:srgbClr val="18181B"/>
+                </a:solidFill>
+                <a:latin typeface="IBM Plex Mono" pitchFamily="34" charset="0"/>
+                <a:ea typeface="IBM Plex Mono" pitchFamily="34" charset="-122"/>
+                <a:cs typeface="IBM Plex Mono" pitchFamily="34" charset="-120"/>
+              </a:rPr>
+              <a:t>n</a:t>
+            </a:r>
+            <a:pPr indent="0" marL="0">
+              <a:lnSpc>
+                <a:spcPct val="118000"/>
+              </a:lnSpc>
+              <a:buNone/>
+            </a:pPr>
+            <a:r>
+              <a:rPr lang="en-US" sz="1700" dirty="0">
+                <a:solidFill>
+                  <a:srgbClr val="18181B"/>
+                </a:solidFill>
+                <a:latin typeface="IBM Plex Mono" pitchFamily="34" charset="0"/>
+                <a:ea typeface="IBM Plex Mono" pitchFamily="34" charset="-122"/>
+                <a:cs typeface="IBM Plex Mono" pitchFamily="34" charset="-120"/>
+              </a:rPr>
+              <a:t> </a:t>
+            </a:r>
+            <a:pPr indent="0" marL="0">
+              <a:lnSpc>
+                <a:spcPct val="118000"/>
+              </a:lnSpc>
+              <a:buNone/>
+            </a:pPr>
+            <a:r>
+              <a:rPr lang="en-US" sz="1700" dirty="0">
+                <a:solidFill>
+                  <a:srgbClr val="3F3F46"/>
+                </a:solidFill>
+                <a:latin typeface="IBM Plex Mono" pitchFamily="34" charset="0"/>
+                <a:ea typeface="IBM Plex Mono" pitchFamily="34" charset="-122"/>
+                <a:cs typeface="IBM Plex Mono" pitchFamily="34" charset="-120"/>
+              </a:rPr>
+              <a:t>/</a:t>
+            </a:r>
+            <a:pPr indent="0" marL="0">
+              <a:lnSpc>
+                <a:spcPct val="118000"/>
+              </a:lnSpc>
+              <a:buNone/>
+            </a:pPr>
+            <a:r>
+              <a:rPr lang="en-US" sz="1700" dirty="0">
+                <a:solidFill>
+                  <a:srgbClr val="18181B"/>
+                </a:solidFill>
+                <a:latin typeface="IBM Plex Mono" pitchFamily="34" charset="0"/>
+                <a:ea typeface="IBM Plex Mono" pitchFamily="34" charset="-122"/>
+                <a:cs typeface="IBM Plex Mono" pitchFamily="34" charset="-120"/>
+              </a:rPr>
+              <a:t> </a:t>
+            </a:r>
+            <a:pPr indent="0" marL="0">
+              <a:lnSpc>
+                <a:spcPct val="118000"/>
+              </a:lnSpc>
+              <a:buNone/>
+            </a:pPr>
+            <a:r>
+              <a:rPr lang="en-US" sz="1700" dirty="0">
+                <a:solidFill>
+                  <a:srgbClr val="9A3412"/>
+                </a:solidFill>
+                <a:latin typeface="IBM Plex Mono" pitchFamily="34" charset="0"/>
+                <a:ea typeface="IBM Plex Mono" pitchFamily="34" charset="-122"/>
+                <a:cs typeface="IBM Plex Mono" pitchFamily="34" charset="-120"/>
+              </a:rPr>
+              <a:t>6</a:t>
+            </a:r>
+            <a:pPr indent="0" marL="0">
+              <a:lnSpc>
+                <a:spcPct val="118000"/>
+              </a:lnSpc>
+              <a:buNone/>
+            </a:pPr>
+            <a:r>
+              <a:rPr lang="en-US" sz="1700" dirty="0">
+                <a:solidFill>
+                  <a:srgbClr val="101828"/>
+                </a:solidFill>
+                <a:latin typeface="IBM Plex Sans" pitchFamily="34" charset="0"/>
+                <a:ea typeface="IBM Plex Sans" pitchFamily="34" charset="-122"/>
+                <a:cs typeface="IBM Plex Sans" pitchFamily="34" charset="-120"/>
+              </a:rPr>
+              <a:t>. State what is wrong with the result this gives, and write the line corrected.</a:t>
+            </a:r>
+            <a:endParaRPr lang="en-US" sz="1700" dirty="0"/>
+          </a:p>
+        </p:txBody>
+      </p:sp>
+      <p:sp>
+        <p:nvSpPr>
+          <p:cNvPr id="9" name="Shape 7"/>
+          <p:cNvSpPr/>
+          <p:nvPr/>
+        </p:nvSpPr>
+        <p:spPr>
+          <a:xfrm>
+            <a:off x="10515600" y="2130552"/>
+            <a:ext cx="868680" cy="493776"/>
+          </a:xfrm>
+          <a:prstGeom prst="roundRect">
+            <a:avLst>
+              <a:gd name="adj" fmla="val 18519"/>
+            </a:avLst>
+          </a:prstGeom>
+          <a:solidFill>
+            <a:srgbClr val="EEF2FB"/>
+          </a:solidFill>
+          <a:ln/>
+        </p:spPr>
+      </p:sp>
+      <p:sp>
+        <p:nvSpPr>
+          <p:cNvPr id="10" name="Text 8"/>
+          <p:cNvSpPr txBox="1"/>
+          <p:nvPr/>
+        </p:nvSpPr>
+        <p:spPr>
+          <a:xfrm>
+            <a:off x="10515600" y="2130552"/>
+            <a:ext cx="868680" cy="493776"/>
+          </a:xfrm>
+          <a:prstGeom prst="rect">
+            <a:avLst/>
+          </a:prstGeom>
+          <a:noFill/>
+          <a:ln/>
+        </p:spPr>
+        <p:txBody>
+          <a:bodyPr wrap="square" lIns="0" tIns="0" rIns="0" bIns="0" rtlCol="0" anchor="ctr"/>
+          <a:lstStyle/>
+          <a:p>
+            <a:pPr algn="ctr" indent="0" marL="0">
+              <a:buNone/>
+            </a:pPr>
+            <a:r>
+              <a:rPr lang="en-US" sz="1500" b="1" dirty="0">
+                <a:solidFill>
+                  <a:srgbClr val="2D63FF"/>
+                </a:solidFill>
+                <a:latin typeface="IBM Plex Mono" pitchFamily="34" charset="0"/>
+                <a:ea typeface="IBM Plex Mono" pitchFamily="34" charset="-122"/>
+                <a:cs typeface="IBM Plex Mono" pitchFamily="34" charset="-120"/>
+              </a:rPr>
+              <a:t>[2]</a:t>
+            </a:r>
+            <a:endParaRPr lang="en-US" sz="1500" dirty="0"/>
+          </a:p>
+        </p:txBody>
+      </p:sp>
+      <p:sp>
+        <p:nvSpPr>
+          <p:cNvPr id="11" name="Shape 9"/>
+          <p:cNvSpPr/>
+          <p:nvPr/>
+        </p:nvSpPr>
+        <p:spPr>
+          <a:xfrm>
+            <a:off x="502920" y="3127248"/>
+            <a:ext cx="11155680" cy="1097280"/>
+          </a:xfrm>
+          <a:prstGeom prst="roundRect">
+            <a:avLst>
+              <a:gd name="adj" fmla="val 10000"/>
+            </a:avLst>
+          </a:prstGeom>
+          <a:solidFill>
+            <a:srgbClr val="FFFFFF"/>
+          </a:solidFill>
+          <a:ln w="15875">
+            <a:solidFill>
+              <a:srgbClr val="D9DEE7"/>
+            </a:solidFill>
+            <a:prstDash val="solid"/>
+          </a:ln>
+        </p:spPr>
+      </p:sp>
+      <p:sp>
+        <p:nvSpPr>
+          <p:cNvPr id="12" name="Text 10"/>
+          <p:cNvSpPr txBox="1"/>
+          <p:nvPr/>
+        </p:nvSpPr>
+        <p:spPr>
+          <a:xfrm>
+            <a:off x="914400" y="3236976"/>
+            <a:ext cx="9418320" cy="877824"/>
+          </a:xfrm>
+          <a:prstGeom prst="rect">
+            <a:avLst/>
+          </a:prstGeom>
+          <a:noFill/>
+          <a:ln/>
+        </p:spPr>
+        <p:txBody>
+          <a:bodyPr wrap="square" lIns="0" tIns="0" rIns="0" bIns="0" rtlCol="0" anchor="ctr"/>
+          <a:lstStyle/>
+          <a:p>
+            <a:pPr indent="0" marL="0">
+              <a:lnSpc>
+                <a:spcPct val="118000"/>
+              </a:lnSpc>
+              <a:buNone/>
+            </a:pPr>
+            <a:r>
+              <a:rPr lang="en-US" sz="1700" dirty="0">
+                <a:solidFill>
+                  <a:srgbClr val="101828"/>
+                </a:solidFill>
+                <a:latin typeface="IBM Plex Sans" pitchFamily="34" charset="0"/>
+                <a:ea typeface="IBM Plex Sans" pitchFamily="34" charset="-122"/>
+                <a:cs typeface="IBM Plex Sans" pitchFamily="34" charset="-120"/>
+              </a:rPr>
+              <a:t>Write a program that reads a whole number of pence and prints how many whole pounds are in it, then how many pence are left over on the next line.</a:t>
+            </a:r>
+            <a:endParaRPr lang="en-US" sz="1700" dirty="0"/>
+          </a:p>
+        </p:txBody>
+      </p:sp>
+      <p:sp>
+        <p:nvSpPr>
+          <p:cNvPr id="13" name="Shape 11"/>
+          <p:cNvSpPr/>
+          <p:nvPr/>
+        </p:nvSpPr>
+        <p:spPr>
+          <a:xfrm>
+            <a:off x="10515600" y="3429000"/>
+            <a:ext cx="868680" cy="493776"/>
+          </a:xfrm>
+          <a:prstGeom prst="roundRect">
+            <a:avLst>
+              <a:gd name="adj" fmla="val 18519"/>
+            </a:avLst>
+          </a:prstGeom>
+          <a:solidFill>
+            <a:srgbClr val="EEF2FB"/>
+          </a:solidFill>
+          <a:ln/>
+        </p:spPr>
+      </p:sp>
+      <p:sp>
+        <p:nvSpPr>
+          <p:cNvPr id="14" name="Text 12"/>
+          <p:cNvSpPr txBox="1"/>
+          <p:nvPr/>
+        </p:nvSpPr>
+        <p:spPr>
+          <a:xfrm>
+            <a:off x="10515600" y="3429000"/>
+            <a:ext cx="868680" cy="493776"/>
+          </a:xfrm>
+          <a:prstGeom prst="rect">
+            <a:avLst/>
+          </a:prstGeom>
+          <a:noFill/>
+          <a:ln/>
+        </p:spPr>
+        <p:txBody>
+          <a:bodyPr wrap="square" lIns="0" tIns="0" rIns="0" bIns="0" rtlCol="0" anchor="ctr"/>
+          <a:lstStyle/>
+          <a:p>
+            <a:pPr algn="ctr" indent="0" marL="0">
+              <a:buNone/>
+            </a:pPr>
+            <a:r>
+              <a:rPr lang="en-US" sz="1500" b="1" dirty="0">
+                <a:solidFill>
+                  <a:srgbClr val="2D63FF"/>
+                </a:solidFill>
+                <a:latin typeface="IBM Plex Mono" pitchFamily="34" charset="0"/>
+                <a:ea typeface="IBM Plex Mono" pitchFamily="34" charset="-122"/>
+                <a:cs typeface="IBM Plex Mono" pitchFamily="34" charset="-120"/>
+              </a:rPr>
+              <a:t>[4]</a:t>
+            </a:r>
+            <a:endParaRPr lang="en-US" sz="1500" dirty="0"/>
+          </a:p>
+        </p:txBody>
+      </p:sp>
+      <p:sp>
+        <p:nvSpPr>
+          <p:cNvPr id="15" name="Shape 13"/>
+          <p:cNvSpPr/>
+          <p:nvPr/>
+        </p:nvSpPr>
+        <p:spPr>
+          <a:xfrm>
+            <a:off x="502920" y="4425696"/>
+            <a:ext cx="11155680" cy="1097280"/>
+          </a:xfrm>
+          <a:prstGeom prst="roundRect">
+            <a:avLst>
+              <a:gd name="adj" fmla="val 10000"/>
+            </a:avLst>
+          </a:prstGeom>
+          <a:solidFill>
+            <a:srgbClr val="FFFFFF"/>
+          </a:solidFill>
+          <a:ln w="15875">
+            <a:solidFill>
+              <a:srgbClr val="D9DEE7"/>
+            </a:solidFill>
+            <a:prstDash val="solid"/>
+          </a:ln>
+        </p:spPr>
+      </p:sp>
+      <p:sp>
+        <p:nvSpPr>
+          <p:cNvPr id="16" name="Text 14"/>
+          <p:cNvSpPr txBox="1"/>
+          <p:nvPr/>
+        </p:nvSpPr>
+        <p:spPr>
+          <a:xfrm>
+            <a:off x="914400" y="4535424"/>
+            <a:ext cx="9418320" cy="877824"/>
+          </a:xfrm>
+          <a:prstGeom prst="rect">
+            <a:avLst/>
+          </a:prstGeom>
+          <a:noFill/>
+          <a:ln/>
+        </p:spPr>
+        <p:txBody>
+          <a:bodyPr wrap="square" lIns="0" tIns="0" rIns="0" bIns="0" rtlCol="0" anchor="ctr"/>
+          <a:lstStyle/>
+          <a:p>
+            <a:pPr indent="0" marL="0">
+              <a:lnSpc>
+                <a:spcPct val="118000"/>
+              </a:lnSpc>
+              <a:buNone/>
+            </a:pPr>
+            <a:r>
+              <a:rPr lang="en-US" sz="1700" dirty="0">
+                <a:solidFill>
+                  <a:srgbClr val="101828"/>
+                </a:solidFill>
+                <a:latin typeface="IBM Plex Sans" pitchFamily="34" charset="0"/>
+                <a:ea typeface="IBM Plex Sans" pitchFamily="34" charset="-122"/>
+                <a:cs typeface="IBM Plex Sans" pitchFamily="34" charset="-120"/>
+              </a:rPr>
+              <a:t>Write a program that reads three whole numbers and prints their average, rounded to one decimal place.</a:t>
+            </a:r>
+            <a:endParaRPr lang="en-US" sz="1700" dirty="0"/>
+          </a:p>
+        </p:txBody>
+      </p:sp>
+      <p:sp>
+        <p:nvSpPr>
+          <p:cNvPr id="17" name="Shape 15"/>
+          <p:cNvSpPr/>
+          <p:nvPr/>
+        </p:nvSpPr>
+        <p:spPr>
+          <a:xfrm>
+            <a:off x="10515600" y="4727448"/>
+            <a:ext cx="868680" cy="493776"/>
+          </a:xfrm>
+          <a:prstGeom prst="roundRect">
+            <a:avLst>
+              <a:gd name="adj" fmla="val 18519"/>
+            </a:avLst>
+          </a:prstGeom>
+          <a:solidFill>
+            <a:srgbClr val="EEF2FB"/>
+          </a:solidFill>
+          <a:ln/>
+        </p:spPr>
+      </p:sp>
+      <p:sp>
+        <p:nvSpPr>
+          <p:cNvPr id="18" name="Text 16"/>
+          <p:cNvSpPr txBox="1"/>
+          <p:nvPr/>
+        </p:nvSpPr>
+        <p:spPr>
+          <a:xfrm>
+            <a:off x="10515600" y="4727448"/>
+            <a:ext cx="868680" cy="493776"/>
+          </a:xfrm>
+          <a:prstGeom prst="rect">
+            <a:avLst/>
+          </a:prstGeom>
+          <a:noFill/>
+          <a:ln/>
+        </p:spPr>
+        <p:txBody>
+          <a:bodyPr wrap="square" lIns="0" tIns="0" rIns="0" bIns="0" rtlCol="0" anchor="ctr"/>
+          <a:lstStyle/>
+          <a:p>
+            <a:pPr algn="ctr" indent="0" marL="0">
+              <a:buNone/>
+            </a:pPr>
+            <a:r>
+              <a:rPr lang="en-US" sz="1500" b="1" dirty="0">
+                <a:solidFill>
+                  <a:srgbClr val="2D63FF"/>
+                </a:solidFill>
+                <a:latin typeface="IBM Plex Mono" pitchFamily="34" charset="0"/>
+                <a:ea typeface="IBM Plex Mono" pitchFamily="34" charset="-122"/>
+                <a:cs typeface="IBM Plex Mono" pitchFamily="34" charset="-120"/>
+              </a:rPr>
+              <a:t>[4]</a:t>
+            </a:r>
+            <a:endParaRPr lang="en-US" sz="1500" dirty="0"/>
+          </a:p>
+        </p:txBody>
+      </p:sp>
+    </p:spTree>
+  </p:cSld>
+  <p:clrMapOvr>
+    <a:masterClrMapping/>
+  </p:clrMapOvr>
+</p:sld>
+</file>
+
+<file path=ppt/slides/slide15.xml><?xml version="1.0" encoding="utf-8"?>
+<p:sld xmlns:a="http://schemas.openxmlformats.org/drawingml/2006/main" xmlns:r="http://schemas.openxmlformats.org/officeDocument/2006/relationships" xmlns:p="http://schemas.openxmlformats.org/presentationml/2006/main">
+  <p:cSld name="Slide 15">
     <p:bg>
       <p:bgPr>
         <a:solidFill>
